--- a/reference_material/slides/022_encoding.pptx
+++ b/reference_material/slides/022_encoding.pptx
@@ -5,33 +5,38 @@
     <p:sldMasterId id="2147483660" r:id="rId1"/>
   </p:sldMasterIdLst>
   <p:notesMasterIdLst>
-    <p:notesMasterId r:id="rId26"/>
+    <p:notesMasterId r:id="rId31"/>
   </p:notesMasterIdLst>
   <p:sldIdLst>
     <p:sldId id="279" r:id="rId2"/>
     <p:sldId id="256" r:id="rId3"/>
     <p:sldId id="257" r:id="rId4"/>
-    <p:sldId id="258" r:id="rId5"/>
-    <p:sldId id="259" r:id="rId6"/>
-    <p:sldId id="260" r:id="rId7"/>
-    <p:sldId id="261" r:id="rId8"/>
-    <p:sldId id="262" r:id="rId9"/>
-    <p:sldId id="263" r:id="rId10"/>
-    <p:sldId id="264" r:id="rId11"/>
-    <p:sldId id="265" r:id="rId12"/>
-    <p:sldId id="266" r:id="rId13"/>
-    <p:sldId id="267" r:id="rId14"/>
-    <p:sldId id="268" r:id="rId15"/>
-    <p:sldId id="270" r:id="rId16"/>
-    <p:sldId id="271" r:id="rId17"/>
-    <p:sldId id="269" r:id="rId18"/>
-    <p:sldId id="272" r:id="rId19"/>
-    <p:sldId id="273" r:id="rId20"/>
-    <p:sldId id="275" r:id="rId21"/>
-    <p:sldId id="276" r:id="rId22"/>
-    <p:sldId id="277" r:id="rId23"/>
-    <p:sldId id="278" r:id="rId24"/>
-    <p:sldId id="274" r:id="rId25"/>
+    <p:sldId id="282" r:id="rId5"/>
+    <p:sldId id="258" r:id="rId6"/>
+    <p:sldId id="259" r:id="rId7"/>
+    <p:sldId id="284" r:id="rId8"/>
+    <p:sldId id="260" r:id="rId9"/>
+    <p:sldId id="261" r:id="rId10"/>
+    <p:sldId id="283" r:id="rId11"/>
+    <p:sldId id="262" r:id="rId12"/>
+    <p:sldId id="263" r:id="rId13"/>
+    <p:sldId id="264" r:id="rId14"/>
+    <p:sldId id="281" r:id="rId15"/>
+    <p:sldId id="265" r:id="rId16"/>
+    <p:sldId id="266" r:id="rId17"/>
+    <p:sldId id="267" r:id="rId18"/>
+    <p:sldId id="268" r:id="rId19"/>
+    <p:sldId id="270" r:id="rId20"/>
+    <p:sldId id="271" r:id="rId21"/>
+    <p:sldId id="269" r:id="rId22"/>
+    <p:sldId id="272" r:id="rId23"/>
+    <p:sldId id="273" r:id="rId24"/>
+    <p:sldId id="275" r:id="rId25"/>
+    <p:sldId id="276" r:id="rId26"/>
+    <p:sldId id="277" r:id="rId27"/>
+    <p:sldId id="278" r:id="rId28"/>
+    <p:sldId id="280" r:id="rId29"/>
+    <p:sldId id="274" r:id="rId30"/>
   </p:sldIdLst>
   <p:sldSz cx="12192000" cy="6858000"/>
   <p:notesSz cx="6858000" cy="9144000"/>
@@ -130,6 +135,11 @@
       </a:defRPr>
     </a:lvl9pPr>
   </p:defaultTextStyle>
+  <p:extLst>
+    <p:ext uri="{EFAFB233-063F-42B5-8137-9DF3F51BA10A}">
+      <p15:sldGuideLst xmlns:p15="http://schemas.microsoft.com/office/powerpoint/2012/main"/>
+    </p:ext>
+  </p:extLst>
 </p:presentation>
 </file>
 
@@ -765,6 +775,7 @@
     <inkml:brush xml:id="br0">
       <inkml:brushProperty name="width" value="0.1" units="cm"/>
       <inkml:brushProperty name="height" value="0.1" units="cm"/>
+      <inkml:brushProperty name="color" value="#FF0000"/>
     </inkml:brush>
   </inkml:definitions>
   <inkml:trace contextRef="#ctx0" brushRef="#br0">24 21 24575,'0'23'0,"4"-1"0,1-4 0,8 0 0,-7-12 0,-6-19 0,-6-4 0,-11-18-6784,7 20 6784,0-2 0,2 8 0,7 8 0,5 22 0,2 9 0,3 3 0,-5-12 0,-4-17 0</inkml:trace>
@@ -1070,6 +1081,7 @@
     <inkml:brush xml:id="br0">
       <inkml:brushProperty name="width" value="0.1" units="cm"/>
       <inkml:brushProperty name="height" value="0.1" units="cm"/>
+      <inkml:brushProperty name="color" value="#FF0000"/>
     </inkml:brush>
   </inkml:definitions>
   <inkml:trace contextRef="#ctx0" brushRef="#br0">232 78 24575,'10'4'0,"-2"1"0,-8 4 0,0 0 0,-4 4 0,-5-7 0,-5 6 0,0-11 0,0 3 0,5-4 0,0 0 0,0 4 0,0-3 0,0 3 0,0-4 0,-4-8 0,-13-20 0,1 5 0,-7-13 0,18 22 0,-2 1 0,14 4 0,-10 4 0,15 1 0,2 4 0,5 0 0,3 0 0,-4-4-1696,4 3 0,-7-3 0,2 4 0</inkml:trace>
@@ -1372,6 +1384,7 @@
     <inkml:brush xml:id="br0">
       <inkml:brushProperty name="width" value="0.1" units="cm"/>
       <inkml:brushProperty name="height" value="0.1" units="cm"/>
+      <inkml:brushProperty name="color" value="#FF0000"/>
     </inkml:brush>
   </inkml:definitions>
   <inkml:trace contextRef="#ctx0" brushRef="#br0">0 0 24575,'9'18'0,"6"47"0,-9-17 0,3 45 0,-5-47 0,-3-7 0,11-18 0,-10-19 0,6 1 0,-16-20 0,2 1 0,-7-10 0,4 11 0,0 2 0,0 5 0,4 11 0,1-2 0,4 4 0,0-1 0</inkml:trace>
@@ -1673,6 +1686,7 @@
     <inkml:brush xml:id="br0">
       <inkml:brushProperty name="width" value="0.1" units="cm"/>
       <inkml:brushProperty name="height" value="0.1" units="cm"/>
+      <inkml:brushProperty name="color" value="#FF0000"/>
     </inkml:brush>
   </inkml:definitions>
   <inkml:trace contextRef="#ctx0" brushRef="#br0">1 0 24575,'9'5'0,"0"3"0,0-7 0,12 11 0,-9-10 0,9 6 0,-12-8 0,-4 8 0,-1-2 0,0 11 0,-3-7 0,3 7 0,-4 5 0,0-6 0,0 13 0,4-18 0,-3 6 0,7-12 0,-7-5 0,3-5 0,-8 0 0,7-3 0,-6 7 0,7-3 0</inkml:trace>
@@ -1980,6 +1994,7 @@
     <inkml:brush xml:id="br0">
       <inkml:brushProperty name="width" value="0.1" units="cm"/>
       <inkml:brushProperty name="height" value="0.1" units="cm"/>
+      <inkml:brushProperty name="color" value="#FF0000"/>
     </inkml:brush>
   </inkml:definitions>
   <inkml:trace contextRef="#ctx0" brushRef="#br0">14 97 24575,'-5'-18'0,"1"3"-9831,4-6 8341,0 10 4308,-5-10-2818,8 15-2818,-2 2 2818,8 5 0,4 15 0,-3-13 4537,11 25-4537,-10-24-4537,2 16 4537,-5-19 4537,-3 7-4537,4-3 0,4 4 0,1 0 0,0 0 0,-1 0 0,-4 0 0,0-4 0,-4 7 0,3-6 0,-3 7 0,8 4 0,-3-10 0,-1 9 6784,-1-15-6784,-3 7 0,4-7 0,0 7 0,0-3 0,-8 0 0,2-1 0,-7-4 0</inkml:trace>
@@ -2287,6 +2302,7 @@
     <inkml:brush xml:id="br0">
       <inkml:brushProperty name="width" value="0.1" units="cm"/>
       <inkml:brushProperty name="height" value="0.1" units="cm"/>
+      <inkml:brushProperty name="color" value="#FF0000"/>
     </inkml:brush>
   </inkml:definitions>
   <inkml:trace contextRef="#ctx0" brushRef="#br0">1 0 24575,'9'10'0,"4"2"0,9-3 0,6 9 0,12 9 0,-15-7 0,0 1 0,-16-16-6784,0 3 6784,0-3 0,4 8 0,5 1 0,-7 0 0,9 3 0,-14-7 0,3 3 0,-5-12 0,-12-10 0,2 2 0,-3-9 0,5 15 0,4-3 0</inkml:trace>
@@ -2594,6 +2610,7 @@
     <inkml:brush xml:id="br0">
       <inkml:brushProperty name="width" value="0.1" units="cm"/>
       <inkml:brushProperty name="height" value="0.1" units="cm"/>
+      <inkml:brushProperty name="color" value="#FF0000"/>
     </inkml:brush>
   </inkml:definitions>
   <inkml:trace contextRef="#ctx0" brushRef="#br0">119 168 24575,'-5'-18'0,"-3"0"0,3 0 0,0 0 0,-3-21 0,7 20 0,1-10 0,1 21 0,7 11 0,-7-2 0,-1 12 0,-9 1 0,2 4 0,-13 12-6784,17-13 6784,-13 4 0,11-17 0,-4-4 0,4 4 0,-3-3 0,3 3 0,0-4 0,0 0 0</inkml:trace>
@@ -3233,7 +3250,7 @@
           <a:p>
             <a:fld id="{614B2740-44A1-CF4E-856B-B25439488917}" type="slidenum">
               <a:rPr lang="en-US" smtClean="0"/>
-              <a:t>24</a:t>
+              <a:t>29</a:t>
             </a:fld>
             <a:endParaRPr lang="en-US"/>
           </a:p>
@@ -6851,13 +6868,8 @@
             <a:pPr lvl="1"/>
             <a:r>
               <a:rPr lang="en-US" dirty="0"/>
-              <a:t>Multiple regression and multicollinearity </a:t>
-            </a:r>
-            <a:r>
-              <a:rPr lang="en-US"/>
-              <a:t>in practice. </a:t>
-            </a:r>
-            <a:endParaRPr lang="en-US" dirty="0"/>
+              <a:t>Multiple regression and multicollinearity in practice. </a:t>
+            </a:r>
           </a:p>
           <a:p>
             <a:pPr lvl="1"/>
@@ -6876,7 +6888,7 @@
           <a:p>
             <a:r>
               <a:rPr lang="en-US" dirty="0"/>
-              <a:t>Assignment should be fully doable. </a:t>
+              <a:t>Assignment should be fully doable with this stuff. </a:t>
             </a:r>
           </a:p>
           <a:p>
@@ -6943,6 +6955,558 @@
           <p:cNvPr id="2" name="Title 1">
             <a:extLst>
               <a:ext uri="{FF2B5EF4-FFF2-40B4-BE49-F238E27FC236}">
+                <a16:creationId xmlns:a16="http://schemas.microsoft.com/office/drawing/2014/main" id="{91C3D055-AEEE-A27C-8BA3-7F60EECC7E11}"/>
+              </a:ext>
+            </a:extLst>
+          </p:cNvPr>
+          <p:cNvSpPr>
+            <a:spLocks noGrp="1"/>
+          </p:cNvSpPr>
+          <p:nvPr>
+            <p:ph type="title"/>
+          </p:nvPr>
+        </p:nvSpPr>
+        <p:spPr/>
+        <p:txBody>
+          <a:bodyPr/>
+          <a:lstStyle/>
+          <a:p>
+            <a:r>
+              <a:rPr lang="en-US" dirty="0"/>
+              <a:t>Variance, Explained!</a:t>
+            </a:r>
+          </a:p>
+        </p:txBody>
+      </p:sp>
+      <p:sp>
+        <p:nvSpPr>
+          <p:cNvPr id="3" name="Content Placeholder 2">
+            <a:extLst>
+              <a:ext uri="{FF2B5EF4-FFF2-40B4-BE49-F238E27FC236}">
+                <a16:creationId xmlns:a16="http://schemas.microsoft.com/office/drawing/2014/main" id="{E69956AF-E6E6-45F9-D165-16F63EF7ACB4}"/>
+              </a:ext>
+            </a:extLst>
+          </p:cNvPr>
+          <p:cNvSpPr>
+            <a:spLocks noGrp="1"/>
+          </p:cNvSpPr>
+          <p:nvPr>
+            <p:ph idx="1"/>
+          </p:nvPr>
+        </p:nvSpPr>
+        <p:spPr>
+          <a:xfrm>
+            <a:off x="97655" y="1853754"/>
+            <a:ext cx="7069546" cy="4199727"/>
+          </a:xfrm>
+        </p:spPr>
+        <p:txBody>
+          <a:bodyPr/>
+          <a:lstStyle/>
+          <a:p>
+            <a:r>
+              <a:rPr lang="en-US" dirty="0"/>
+              <a:t>There’s a certain amount of variance in the data. </a:t>
+            </a:r>
+          </a:p>
+          <a:p>
+            <a:pPr lvl="1"/>
+            <a:r>
+              <a:rPr lang="en-US" dirty="0"/>
+              <a:t>Y values literally vary from the mean. We have no explanation. </a:t>
+            </a:r>
+          </a:p>
+          <a:p>
+            <a:r>
+              <a:rPr lang="en-US" dirty="0"/>
+              <a:t>Model aims to ‘explain’ variance, i.e. tell us the exact value of Y. </a:t>
+            </a:r>
+          </a:p>
+          <a:p>
+            <a:pPr lvl="1"/>
+            <a:r>
+              <a:rPr lang="en-US" dirty="0"/>
+              <a:t>Without any other data (e.g. X) the best model is just mean of Y – this has </a:t>
+            </a:r>
+            <a:r>
+              <a:rPr lang="en-US" dirty="0" err="1"/>
+              <a:t>unexp</a:t>
+            </a:r>
+            <a:r>
+              <a:rPr lang="en-US" dirty="0"/>
+              <a:t>. Var. SS-total. </a:t>
+            </a:r>
+          </a:p>
+          <a:p>
+            <a:pPr lvl="1"/>
+            <a:r>
+              <a:rPr lang="en-US" dirty="0"/>
+              <a:t>Also the worst possible model we could make, a naïve version. </a:t>
+            </a:r>
+          </a:p>
+          <a:p>
+            <a:r>
+              <a:rPr lang="en-US" dirty="0"/>
+              <a:t>The r2 tells us the amount of the original </a:t>
+            </a:r>
+            <a:r>
+              <a:rPr lang="en-US" dirty="0" err="1"/>
+              <a:t>unexp</a:t>
+            </a:r>
+            <a:r>
+              <a:rPr lang="en-US" dirty="0"/>
+              <a:t>. Var we explain.</a:t>
+            </a:r>
+          </a:p>
+          <a:p>
+            <a:pPr lvl="1"/>
+            <a:r>
+              <a:rPr lang="en-US" dirty="0"/>
+              <a:t>The ss-total is the starting amount of error (mean model). </a:t>
+            </a:r>
+          </a:p>
+          <a:p>
+            <a:pPr lvl="1"/>
+            <a:r>
+              <a:rPr lang="en-US" dirty="0"/>
+              <a:t>The ss-regression is how much of that error gets erased. </a:t>
+            </a:r>
+          </a:p>
+          <a:p>
+            <a:r>
+              <a:rPr lang="en-US" dirty="0"/>
+              <a:t>The ss-error is the still unexplained variance. </a:t>
+            </a:r>
+          </a:p>
+        </p:txBody>
+      </p:sp>
+      <p:pic>
+        <p:nvPicPr>
+          <p:cNvPr id="4" name="Picture 2" descr="Statistical Regression SSR / SSE / SST | Dr. Walid Soula | Artificial  Intelligence in Plain English">
+            <a:extLst>
+              <a:ext uri="{FF2B5EF4-FFF2-40B4-BE49-F238E27FC236}">
+                <a16:creationId xmlns:a16="http://schemas.microsoft.com/office/drawing/2014/main" id="{CB2FE8EC-F03C-3D6F-1C7E-98A1D4589E2F}"/>
+              </a:ext>
+            </a:extLst>
+          </p:cNvPr>
+          <p:cNvPicPr>
+            <a:picLocks noChangeAspect="1" noChangeArrowheads="1"/>
+          </p:cNvPicPr>
+          <p:nvPr/>
+        </p:nvPicPr>
+        <p:blipFill>
+          <a:blip r:embed="rId2">
+            <a:extLst>
+              <a:ext uri="{28A0092B-C50C-407E-A947-70E740481C1C}">
+                <a14:useLocalDpi xmlns:a14="http://schemas.microsoft.com/office/drawing/2010/main" val="0"/>
+              </a:ext>
+            </a:extLst>
+          </a:blip>
+          <a:srcRect/>
+          <a:stretch>
+            <a:fillRect/>
+          </a:stretch>
+        </p:blipFill>
+        <p:spPr bwMode="auto">
+          <a:xfrm>
+            <a:off x="7167200" y="2166139"/>
+            <a:ext cx="5024800" cy="3574956"/>
+          </a:xfrm>
+          <a:prstGeom prst="rect">
+            <a:avLst/>
+          </a:prstGeom>
+          <a:noFill/>
+          <a:extLst>
+            <a:ext uri="{909E8E84-426E-40DD-AFC4-6F175D3DCCD1}">
+              <a14:hiddenFill xmlns:a14="http://schemas.microsoft.com/office/drawing/2010/main">
+                <a:solidFill>
+                  <a:srgbClr val="FFFFFF"/>
+                </a:solidFill>
+              </a14:hiddenFill>
+            </a:ext>
+          </a:extLst>
+        </p:spPr>
+      </p:pic>
+    </p:spTree>
+    <p:extLst>
+      <p:ext uri="{BB962C8B-B14F-4D97-AF65-F5344CB8AC3E}">
+        <p14:creationId xmlns:p14="http://schemas.microsoft.com/office/powerpoint/2010/main" val="1439096099"/>
+      </p:ext>
+    </p:extLst>
+  </p:cSld>
+  <p:clrMapOvr>
+    <a:masterClrMapping/>
+  </p:clrMapOvr>
+</p:sld>
+</file>
+
+<file path=ppt/slides/slide11.xml><?xml version="1.0" encoding="utf-8"?>
+<p:sld xmlns:a="http://schemas.openxmlformats.org/drawingml/2006/main" xmlns:r="http://schemas.openxmlformats.org/officeDocument/2006/relationships" xmlns:p="http://schemas.openxmlformats.org/presentationml/2006/main">
+  <p:cSld>
+    <p:spTree>
+      <p:nvGrpSpPr>
+        <p:cNvPr id="1" name=""/>
+        <p:cNvGrpSpPr/>
+        <p:nvPr/>
+      </p:nvGrpSpPr>
+      <p:grpSpPr>
+        <a:xfrm>
+          <a:off x="0" y="0"/>
+          <a:ext cx="0" cy="0"/>
+          <a:chOff x="0" y="0"/>
+          <a:chExt cx="0" cy="0"/>
+        </a:xfrm>
+      </p:grpSpPr>
+      <p:sp>
+        <p:nvSpPr>
+          <p:cNvPr id="2" name="Title 1">
+            <a:extLst>
+              <a:ext uri="{FF2B5EF4-FFF2-40B4-BE49-F238E27FC236}">
+                <a16:creationId xmlns:a16="http://schemas.microsoft.com/office/drawing/2014/main" id="{CC4B3966-A021-E34C-DE84-31BA0514E05A}"/>
+              </a:ext>
+            </a:extLst>
+          </p:cNvPr>
+          <p:cNvSpPr>
+            <a:spLocks noGrp="1"/>
+          </p:cNvSpPr>
+          <p:nvPr>
+            <p:ph type="title"/>
+          </p:nvPr>
+        </p:nvSpPr>
+        <p:spPr/>
+        <p:txBody>
+          <a:bodyPr/>
+          <a:lstStyle/>
+          <a:p>
+            <a:r>
+              <a:rPr lang="en-US" dirty="0"/>
+              <a:t>So…</a:t>
+            </a:r>
+          </a:p>
+        </p:txBody>
+      </p:sp>
+      <p:sp>
+        <p:nvSpPr>
+          <p:cNvPr id="3" name="Content Placeholder 2">
+            <a:extLst>
+              <a:ext uri="{FF2B5EF4-FFF2-40B4-BE49-F238E27FC236}">
+                <a16:creationId xmlns:a16="http://schemas.microsoft.com/office/drawing/2014/main" id="{1ADFC4C7-56A0-A530-833F-7BF88EA3A477}"/>
+              </a:ext>
+            </a:extLst>
+          </p:cNvPr>
+          <p:cNvSpPr>
+            <a:spLocks noGrp="1"/>
+          </p:cNvSpPr>
+          <p:nvPr>
+            <p:ph idx="1"/>
+          </p:nvPr>
+        </p:nvSpPr>
+        <p:spPr>
+          <a:xfrm>
+            <a:off x="1451579" y="1926454"/>
+            <a:ext cx="9603275" cy="4127027"/>
+          </a:xfrm>
+        </p:spPr>
+        <p:txBody>
+          <a:bodyPr/>
+          <a:lstStyle/>
+          <a:p>
+            <a:r>
+              <a:rPr lang="en-US" dirty="0"/>
+              <a:t>The residuals can be measured and tallied into MSE/RMSE. </a:t>
+            </a:r>
+          </a:p>
+          <a:p>
+            <a:pPr lvl="1"/>
+            <a:r>
+              <a:rPr lang="en-US" dirty="0"/>
+              <a:t>Direct metric of error – how large are the average residuals(-</a:t>
+            </a:r>
+            <a:r>
+              <a:rPr lang="en-US" dirty="0" err="1"/>
+              <a:t>ish</a:t>
+            </a:r>
+            <a:r>
+              <a:rPr lang="en-US" dirty="0"/>
+              <a:t>). </a:t>
+            </a:r>
+          </a:p>
+          <a:p>
+            <a:r>
+              <a:rPr lang="en-US" dirty="0"/>
+              <a:t>The residuals also generate the R2, but with more arithmetic. </a:t>
+            </a:r>
+          </a:p>
+          <a:p>
+            <a:pPr lvl="1"/>
+            <a:r>
+              <a:rPr lang="en-US" dirty="0"/>
+              <a:t>The naïve (no X value) model is taken as the baseline, with large residuals. </a:t>
+            </a:r>
+          </a:p>
+          <a:p>
+            <a:pPr lvl="1"/>
+            <a:r>
+              <a:rPr lang="en-US" dirty="0"/>
+              <a:t>The new model with X is better, with smaller residuals. </a:t>
+            </a:r>
+          </a:p>
+          <a:p>
+            <a:pPr lvl="1"/>
+            <a:r>
+              <a:rPr lang="en-US" dirty="0"/>
+              <a:t>The amount of the original residuals we’ve explained, or removed, is ~R2. </a:t>
+            </a:r>
+          </a:p>
+          <a:p>
+            <a:pPr lvl="1"/>
+            <a:r>
+              <a:rPr lang="en-US" dirty="0"/>
+              <a:t>This is an indirect measure of error, but still residual based. </a:t>
+            </a:r>
+          </a:p>
+          <a:p>
+            <a:r>
+              <a:rPr lang="en-US" dirty="0"/>
+              <a:t>R2 is usually used as a default score for regression. </a:t>
+            </a:r>
+          </a:p>
+          <a:p>
+            <a:pPr lvl="1"/>
+            <a:r>
+              <a:rPr lang="en-US" dirty="0"/>
+              <a:t>Informally describes ‘fit’ – how well model matches data. </a:t>
+            </a:r>
+          </a:p>
+        </p:txBody>
+      </p:sp>
+    </p:spTree>
+    <p:extLst>
+      <p:ext uri="{BB962C8B-B14F-4D97-AF65-F5344CB8AC3E}">
+        <p14:creationId xmlns:p14="http://schemas.microsoft.com/office/powerpoint/2010/main" val="1144868392"/>
+      </p:ext>
+    </p:extLst>
+  </p:cSld>
+  <p:clrMapOvr>
+    <a:masterClrMapping/>
+  </p:clrMapOvr>
+</p:sld>
+</file>
+
+<file path=ppt/slides/slide12.xml><?xml version="1.0" encoding="utf-8"?>
+<p:sld xmlns:a="http://schemas.openxmlformats.org/drawingml/2006/main" xmlns:r="http://schemas.openxmlformats.org/officeDocument/2006/relationships" xmlns:p="http://schemas.openxmlformats.org/presentationml/2006/main">
+  <p:cSld>
+    <p:spTree>
+      <p:nvGrpSpPr>
+        <p:cNvPr id="1" name=""/>
+        <p:cNvGrpSpPr/>
+        <p:nvPr/>
+      </p:nvGrpSpPr>
+      <p:grpSpPr>
+        <a:xfrm>
+          <a:off x="0" y="0"/>
+          <a:ext cx="0" cy="0"/>
+          <a:chOff x="0" y="0"/>
+          <a:chExt cx="0" cy="0"/>
+        </a:xfrm>
+      </p:grpSpPr>
+      <p:sp>
+        <p:nvSpPr>
+          <p:cNvPr id="2" name="Title 1">
+            <a:extLst>
+              <a:ext uri="{FF2B5EF4-FFF2-40B4-BE49-F238E27FC236}">
+                <a16:creationId xmlns:a16="http://schemas.microsoft.com/office/drawing/2014/main" id="{6D7DC5C7-B219-BB65-D39E-2980D7949C0E}"/>
+              </a:ext>
+            </a:extLst>
+          </p:cNvPr>
+          <p:cNvSpPr>
+            <a:spLocks noGrp="1"/>
+          </p:cNvSpPr>
+          <p:nvPr>
+            <p:ph type="title"/>
+          </p:nvPr>
+        </p:nvSpPr>
+        <p:spPr/>
+        <p:txBody>
+          <a:bodyPr/>
+          <a:lstStyle/>
+          <a:p>
+            <a:r>
+              <a:rPr lang="en-US" dirty="0"/>
+              <a:t>Multiple Regression and R2</a:t>
+            </a:r>
+          </a:p>
+        </p:txBody>
+      </p:sp>
+      <p:sp>
+        <p:nvSpPr>
+          <p:cNvPr id="3" name="Content Placeholder 2">
+            <a:extLst>
+              <a:ext uri="{FF2B5EF4-FFF2-40B4-BE49-F238E27FC236}">
+                <a16:creationId xmlns:a16="http://schemas.microsoft.com/office/drawing/2014/main" id="{866B7B81-3BD7-7126-9487-A59B781DAAF1}"/>
+              </a:ext>
+            </a:extLst>
+          </p:cNvPr>
+          <p:cNvSpPr>
+            <a:spLocks noGrp="1"/>
+          </p:cNvSpPr>
+          <p:nvPr>
+            <p:ph idx="1"/>
+          </p:nvPr>
+        </p:nvSpPr>
+        <p:spPr>
+          <a:xfrm>
+            <a:off x="95693" y="2015732"/>
+            <a:ext cx="7651307" cy="4037749"/>
+          </a:xfrm>
+        </p:spPr>
+        <p:txBody>
+          <a:bodyPr/>
+          <a:lstStyle/>
+          <a:p>
+            <a:r>
+              <a:rPr lang="en-US" dirty="0"/>
+              <a:t>Multiple regression, with more than one X, works the same way. </a:t>
+            </a:r>
+          </a:p>
+          <a:p>
+            <a:pPr lvl="1"/>
+            <a:r>
+              <a:rPr lang="en-US" dirty="0"/>
+              <a:t>We have a target – Y. </a:t>
+            </a:r>
+          </a:p>
+          <a:p>
+            <a:pPr lvl="1"/>
+            <a:r>
+              <a:rPr lang="en-US" dirty="0"/>
+              <a:t>We have multiple inputs – X1, X2, X3….</a:t>
+            </a:r>
+          </a:p>
+          <a:p>
+            <a:pPr lvl="1"/>
+            <a:r>
+              <a:rPr lang="en-US" dirty="0"/>
+              <a:t>The concept works the same way, it’s just hard to visualize. </a:t>
+            </a:r>
+          </a:p>
+          <a:p>
+            <a:pPr lvl="1"/>
+            <a:r>
+              <a:rPr lang="en-US" dirty="0"/>
+              <a:t>Model is y = x1*m1+x2*m2+….b. </a:t>
+            </a:r>
+          </a:p>
+          <a:p>
+            <a:pPr lvl="1"/>
+            <a:r>
+              <a:rPr lang="en-US" dirty="0"/>
+              <a:t>Coefficients are weightings of input contributions*. </a:t>
+            </a:r>
+          </a:p>
+          <a:p>
+            <a:r>
+              <a:rPr lang="en-US" dirty="0"/>
+              <a:t>The error calculations are the same, only Y is involved. </a:t>
+            </a:r>
+          </a:p>
+          <a:p>
+            <a:pPr lvl="1"/>
+            <a:r>
+              <a:rPr lang="en-US" dirty="0"/>
+              <a:t>Error looks at Y versus predicted Y, so math is identical no matter size. </a:t>
+            </a:r>
+          </a:p>
+          <a:p>
+            <a:r>
+              <a:rPr lang="en-US" dirty="0"/>
+              <a:t>The X values are generally called features or the feature set. </a:t>
+            </a:r>
+          </a:p>
+        </p:txBody>
+      </p:sp>
+      <p:pic>
+        <p:nvPicPr>
+          <p:cNvPr id="1026" name="Picture 2" descr="Multiple linear regression made simple - Stats and R">
+            <a:extLst>
+              <a:ext uri="{FF2B5EF4-FFF2-40B4-BE49-F238E27FC236}">
+                <a16:creationId xmlns:a16="http://schemas.microsoft.com/office/drawing/2014/main" id="{C8758913-8246-E92D-539B-CD9833E3A8AA}"/>
+              </a:ext>
+            </a:extLst>
+          </p:cNvPr>
+          <p:cNvPicPr>
+            <a:picLocks noChangeAspect="1" noChangeArrowheads="1"/>
+          </p:cNvPicPr>
+          <p:nvPr/>
+        </p:nvPicPr>
+        <p:blipFill>
+          <a:blip r:embed="rId2">
+            <a:extLst>
+              <a:ext uri="{28A0092B-C50C-407E-A947-70E740481C1C}">
+                <a14:useLocalDpi xmlns:a14="http://schemas.microsoft.com/office/drawing/2010/main" val="0"/>
+              </a:ext>
+            </a:extLst>
+          </a:blip>
+          <a:srcRect/>
+          <a:stretch>
+            <a:fillRect/>
+          </a:stretch>
+        </p:blipFill>
+        <p:spPr bwMode="auto">
+          <a:xfrm>
+            <a:off x="7747000" y="1608481"/>
+            <a:ext cx="4445000" cy="4445000"/>
+          </a:xfrm>
+          <a:prstGeom prst="rect">
+            <a:avLst/>
+          </a:prstGeom>
+          <a:noFill/>
+          <a:extLst>
+            <a:ext uri="{909E8E84-426E-40DD-AFC4-6F175D3DCCD1}">
+              <a14:hiddenFill xmlns:a14="http://schemas.microsoft.com/office/drawing/2010/main">
+                <a:solidFill>
+                  <a:srgbClr val="FFFFFF"/>
+                </a:solidFill>
+              </a14:hiddenFill>
+            </a:ext>
+          </a:extLst>
+        </p:spPr>
+      </p:pic>
+    </p:spTree>
+    <p:extLst>
+      <p:ext uri="{BB962C8B-B14F-4D97-AF65-F5344CB8AC3E}">
+        <p14:creationId xmlns:p14="http://schemas.microsoft.com/office/powerpoint/2010/main" val="2214667635"/>
+      </p:ext>
+    </p:extLst>
+  </p:cSld>
+  <p:clrMapOvr>
+    <a:masterClrMapping/>
+  </p:clrMapOvr>
+</p:sld>
+</file>
+
+<file path=ppt/slides/slide13.xml><?xml version="1.0" encoding="utf-8"?>
+<p:sld xmlns:a="http://schemas.openxmlformats.org/drawingml/2006/main" xmlns:r="http://schemas.openxmlformats.org/officeDocument/2006/relationships" xmlns:p="http://schemas.openxmlformats.org/presentationml/2006/main">
+  <p:cSld>
+    <p:spTree>
+      <p:nvGrpSpPr>
+        <p:cNvPr id="1" name=""/>
+        <p:cNvGrpSpPr/>
+        <p:nvPr/>
+      </p:nvGrpSpPr>
+      <p:grpSpPr>
+        <a:xfrm>
+          <a:off x="0" y="0"/>
+          <a:ext cx="0" cy="0"/>
+          <a:chOff x="0" y="0"/>
+          <a:chExt cx="0" cy="0"/>
+        </a:xfrm>
+      </p:grpSpPr>
+      <p:sp>
+        <p:nvSpPr>
+          <p:cNvPr id="2" name="Title 1">
+            <a:extLst>
+              <a:ext uri="{FF2B5EF4-FFF2-40B4-BE49-F238E27FC236}">
                 <a16:creationId xmlns:a16="http://schemas.microsoft.com/office/drawing/2014/main" id="{7661FDBA-BA08-956D-8496-9F9EB3B7247E}"/>
               </a:ext>
             </a:extLst>
@@ -7006,6 +7570,13 @@
             <a:r>
               <a:rPr lang="en-US" dirty="0"/>
               <a:t>Feature width + 1 dimension visual. </a:t>
+            </a:r>
+          </a:p>
+          <a:p>
+            <a:pPr lvl="1"/>
+            <a:r>
+              <a:rPr lang="en-US" dirty="0"/>
+              <a:t>Each feature is one term in calculation. </a:t>
             </a:r>
           </a:p>
           <a:p>
@@ -7100,7 +7671,90 @@
 </p:sld>
 </file>
 
-<file path=ppt/slides/slide11.xml><?xml version="1.0" encoding="utf-8"?>
+<file path=ppt/slides/slide14.xml><?xml version="1.0" encoding="utf-8"?>
+<p:sld xmlns:a="http://schemas.openxmlformats.org/drawingml/2006/main" xmlns:r="http://schemas.openxmlformats.org/officeDocument/2006/relationships" xmlns:p="http://schemas.openxmlformats.org/presentationml/2006/main">
+  <p:cSld>
+    <p:spTree>
+      <p:nvGrpSpPr>
+        <p:cNvPr id="1" name=""/>
+        <p:cNvGrpSpPr/>
+        <p:nvPr/>
+      </p:nvGrpSpPr>
+      <p:grpSpPr>
+        <a:xfrm>
+          <a:off x="0" y="0"/>
+          <a:ext cx="0" cy="0"/>
+          <a:chOff x="0" y="0"/>
+          <a:chExt cx="0" cy="0"/>
+        </a:xfrm>
+      </p:grpSpPr>
+      <p:sp>
+        <p:nvSpPr>
+          <p:cNvPr id="2" name="Title 1">
+            <a:extLst>
+              <a:ext uri="{FF2B5EF4-FFF2-40B4-BE49-F238E27FC236}">
+                <a16:creationId xmlns:a16="http://schemas.microsoft.com/office/drawing/2014/main" id="{A31C48FA-9C5D-AF71-C521-C9A1E2F0DBD6}"/>
+              </a:ext>
+            </a:extLst>
+          </p:cNvPr>
+          <p:cNvSpPr>
+            <a:spLocks noGrp="1"/>
+          </p:cNvSpPr>
+          <p:nvPr>
+            <p:ph type="title"/>
+          </p:nvPr>
+        </p:nvSpPr>
+        <p:spPr/>
+        <p:txBody>
+          <a:bodyPr/>
+          <a:lstStyle/>
+          <a:p>
+            <a:r>
+              <a:rPr lang="en-US" dirty="0"/>
+              <a:t>Let’s Multiple Regress</a:t>
+            </a:r>
+          </a:p>
+        </p:txBody>
+      </p:sp>
+      <p:sp>
+        <p:nvSpPr>
+          <p:cNvPr id="3" name="Content Placeholder 2">
+            <a:extLst>
+              <a:ext uri="{FF2B5EF4-FFF2-40B4-BE49-F238E27FC236}">
+                <a16:creationId xmlns:a16="http://schemas.microsoft.com/office/drawing/2014/main" id="{B9F1EC00-871E-F28F-E17D-B7CC6E450BCC}"/>
+              </a:ext>
+            </a:extLst>
+          </p:cNvPr>
+          <p:cNvSpPr>
+            <a:spLocks noGrp="1"/>
+          </p:cNvSpPr>
+          <p:nvPr>
+            <p:ph idx="1"/>
+          </p:nvPr>
+        </p:nvSpPr>
+        <p:spPr/>
+        <p:txBody>
+          <a:bodyPr/>
+          <a:lstStyle/>
+          <a:p>
+            <a:endParaRPr lang="en-US"/>
+          </a:p>
+        </p:txBody>
+      </p:sp>
+    </p:spTree>
+    <p:extLst>
+      <p:ext uri="{BB962C8B-B14F-4D97-AF65-F5344CB8AC3E}">
+        <p14:creationId xmlns:p14="http://schemas.microsoft.com/office/powerpoint/2010/main" val="2706494974"/>
+      </p:ext>
+    </p:extLst>
+  </p:cSld>
+  <p:clrMapOvr>
+    <a:masterClrMapping/>
+  </p:clrMapOvr>
+</p:sld>
+</file>
+
+<file path=ppt/slides/slide15.xml><?xml version="1.0" encoding="utf-8"?>
 <p:sld xmlns:a="http://schemas.openxmlformats.org/drawingml/2006/main" xmlns:r="http://schemas.openxmlformats.org/officeDocument/2006/relationships" xmlns:p="http://schemas.openxmlformats.org/presentationml/2006/main">
   <p:cSld>
     <p:spTree>
@@ -7292,7 +7946,7 @@
 </p:sld>
 </file>
 
-<file path=ppt/slides/slide12.xml><?xml version="1.0" encoding="utf-8"?>
+<file path=ppt/slides/slide16.xml><?xml version="1.0" encoding="utf-8"?>
 <p:sld xmlns:a="http://schemas.openxmlformats.org/drawingml/2006/main" xmlns:r="http://schemas.openxmlformats.org/officeDocument/2006/relationships" xmlns:p="http://schemas.openxmlformats.org/presentationml/2006/main">
   <p:cSld>
     <p:spTree>
@@ -7433,7 +8087,7 @@
 </p:sld>
 </file>
 
-<file path=ppt/slides/slide13.xml><?xml version="1.0" encoding="utf-8"?>
+<file path=ppt/slides/slide17.xml><?xml version="1.0" encoding="utf-8"?>
 <p:sld xmlns:a="http://schemas.openxmlformats.org/drawingml/2006/main" xmlns:r="http://schemas.openxmlformats.org/officeDocument/2006/relationships" xmlns:p="http://schemas.openxmlformats.org/presentationml/2006/main">
   <p:cSld>
     <p:spTree>
@@ -7584,7 +8238,7 @@
 </p:sld>
 </file>
 
-<file path=ppt/slides/slide14.xml><?xml version="1.0" encoding="utf-8"?>
+<file path=ppt/slides/slide18.xml><?xml version="1.0" encoding="utf-8"?>
 <p:sld xmlns:a="http://schemas.openxmlformats.org/drawingml/2006/main" xmlns:r="http://schemas.openxmlformats.org/officeDocument/2006/relationships" xmlns:p="http://schemas.openxmlformats.org/presentationml/2006/main">
   <p:cSld>
     <p:spTree>
@@ -7735,7 +8389,7 @@
 </p:sld>
 </file>
 
-<file path=ppt/slides/slide15.xml><?xml version="1.0" encoding="utf-8"?>
+<file path=ppt/slides/slide19.xml><?xml version="1.0" encoding="utf-8"?>
 <p:sld xmlns:a="http://schemas.openxmlformats.org/drawingml/2006/main" xmlns:r="http://schemas.openxmlformats.org/officeDocument/2006/relationships" xmlns:p="http://schemas.openxmlformats.org/presentationml/2006/main">
   <p:cSld>
     <p:spTree>
@@ -7798,8 +8452,8 @@
         </p:nvSpPr>
         <p:spPr>
           <a:xfrm>
-            <a:off x="1451579" y="2015732"/>
-            <a:ext cx="7010431" cy="4037749"/>
+            <a:off x="712923" y="2015732"/>
+            <a:ext cx="7749088" cy="4037749"/>
           </a:xfrm>
         </p:spPr>
         <p:txBody>
@@ -7808,7 +8462,7 @@
           <a:p>
             <a:r>
               <a:rPr lang="en-US" dirty="0"/>
-              <a:t>Label encoding works well with ordinal data. Recall the types of categorical:</a:t>
+              <a:t>Label encoding works well with ordinal data. Recall types of categorical:</a:t>
             </a:r>
           </a:p>
           <a:p>
@@ -7953,7 +8607,90 @@
 </p:sld>
 </file>
 
-<file path=ppt/slides/slide16.xml><?xml version="1.0" encoding="utf-8"?>
+<file path=ppt/slides/slide2.xml><?xml version="1.0" encoding="utf-8"?>
+<p:sld xmlns:a="http://schemas.openxmlformats.org/drawingml/2006/main" xmlns:r="http://schemas.openxmlformats.org/officeDocument/2006/relationships" xmlns:p="http://schemas.openxmlformats.org/presentationml/2006/main">
+  <p:cSld>
+    <p:spTree>
+      <p:nvGrpSpPr>
+        <p:cNvPr id="1" name=""/>
+        <p:cNvGrpSpPr/>
+        <p:nvPr/>
+      </p:nvGrpSpPr>
+      <p:grpSpPr>
+        <a:xfrm>
+          <a:off x="0" y="0"/>
+          <a:ext cx="0" cy="0"/>
+          <a:chOff x="0" y="0"/>
+          <a:chExt cx="0" cy="0"/>
+        </a:xfrm>
+      </p:grpSpPr>
+      <p:sp>
+        <p:nvSpPr>
+          <p:cNvPr id="2" name="Title 1">
+            <a:extLst>
+              <a:ext uri="{FF2B5EF4-FFF2-40B4-BE49-F238E27FC236}">
+                <a16:creationId xmlns:a16="http://schemas.microsoft.com/office/drawing/2014/main" id="{62BA7CB4-C1E2-7903-5C47-8116D048EEA1}"/>
+              </a:ext>
+            </a:extLst>
+          </p:cNvPr>
+          <p:cNvSpPr>
+            <a:spLocks noGrp="1"/>
+          </p:cNvSpPr>
+          <p:nvPr>
+            <p:ph type="ctrTitle"/>
+          </p:nvPr>
+        </p:nvSpPr>
+        <p:spPr/>
+        <p:txBody>
+          <a:bodyPr/>
+          <a:lstStyle/>
+          <a:p>
+            <a:r>
+              <a:rPr lang="en-US" dirty="0"/>
+              <a:t>Categorical data and Encoding</a:t>
+            </a:r>
+          </a:p>
+        </p:txBody>
+      </p:sp>
+      <p:sp>
+        <p:nvSpPr>
+          <p:cNvPr id="3" name="Subtitle 2">
+            <a:extLst>
+              <a:ext uri="{FF2B5EF4-FFF2-40B4-BE49-F238E27FC236}">
+                <a16:creationId xmlns:a16="http://schemas.microsoft.com/office/drawing/2014/main" id="{3FAE5C50-270E-D4A9-E3E7-63F3B4449C80}"/>
+              </a:ext>
+            </a:extLst>
+          </p:cNvPr>
+          <p:cNvSpPr>
+            <a:spLocks noGrp="1"/>
+          </p:cNvSpPr>
+          <p:nvPr>
+            <p:ph type="subTitle" idx="1"/>
+          </p:nvPr>
+        </p:nvSpPr>
+        <p:spPr/>
+        <p:txBody>
+          <a:bodyPr/>
+          <a:lstStyle/>
+          <a:p>
+            <a:endParaRPr lang="en-US"/>
+          </a:p>
+        </p:txBody>
+      </p:sp>
+    </p:spTree>
+    <p:extLst>
+      <p:ext uri="{BB962C8B-B14F-4D97-AF65-F5344CB8AC3E}">
+        <p14:creationId xmlns:p14="http://schemas.microsoft.com/office/powerpoint/2010/main" val="3204280037"/>
+      </p:ext>
+    </p:extLst>
+  </p:cSld>
+  <p:clrMapOvr>
+    <a:masterClrMapping/>
+  </p:clrMapOvr>
+</p:sld>
+</file>
+
+<file path=ppt/slides/slide20.xml><?xml version="1.0" encoding="utf-8"?>
 <p:sld xmlns:a="http://schemas.openxmlformats.org/drawingml/2006/main" xmlns:r="http://schemas.openxmlformats.org/officeDocument/2006/relationships" xmlns:p="http://schemas.openxmlformats.org/presentationml/2006/main">
   <p:cSld>
     <p:spTree>
@@ -8016,8 +8753,8 @@
         </p:nvSpPr>
         <p:spPr>
           <a:xfrm>
-            <a:off x="6181897" y="2015732"/>
-            <a:ext cx="5867785" cy="3670173"/>
+            <a:off x="5618137" y="2015732"/>
+            <a:ext cx="6431545" cy="4037749"/>
           </a:xfrm>
         </p:spPr>
         <p:txBody>
@@ -8053,6 +8790,19 @@
             <a:r>
               <a:rPr lang="en-US" dirty="0"/>
               <a:t>We are introducing a ‘ranking’ that doesn’t exist. </a:t>
+            </a:r>
+          </a:p>
+          <a:p>
+            <a:pPr lvl="1"/>
+            <a:r>
+              <a:rPr lang="en-US" dirty="0"/>
+              <a:t>The model will take the 3 as 3 – it doesn’t know anything other than the fact it is a number. </a:t>
+            </a:r>
+          </a:p>
+          <a:p>
+            <a:r>
+              <a:rPr lang="en-US" dirty="0"/>
+              <a:t>We don’t want 3 to be treated as 3 times 1, just different. </a:t>
             </a:r>
           </a:p>
           <a:p>
@@ -8090,8 +8840,8 @@
         </p:blipFill>
         <p:spPr bwMode="auto">
           <a:xfrm>
-            <a:off x="314112" y="2181261"/>
-            <a:ext cx="5867785" cy="3119553"/>
+            <a:off x="142319" y="2381898"/>
+            <a:ext cx="5475818" cy="2911167"/>
           </a:xfrm>
           <a:prstGeom prst="rect">
             <a:avLst/>
@@ -8121,7 +8871,7 @@
 </p:sld>
 </file>
 
-<file path=ppt/slides/slide17.xml><?xml version="1.0" encoding="utf-8"?>
+<file path=ppt/slides/slide21.xml><?xml version="1.0" encoding="utf-8"?>
 <p:sld xmlns:a="http://schemas.openxmlformats.org/drawingml/2006/main" xmlns:r="http://schemas.openxmlformats.org/officeDocument/2006/relationships" xmlns:p="http://schemas.openxmlformats.org/presentationml/2006/main">
   <p:cSld>
     <p:spTree>
@@ -8293,7 +9043,7 @@
 </p:sld>
 </file>
 
-<file path=ppt/slides/slide18.xml><?xml version="1.0" encoding="utf-8"?>
+<file path=ppt/slides/slide22.xml><?xml version="1.0" encoding="utf-8"?>
 <p:sld xmlns:a="http://schemas.openxmlformats.org/drawingml/2006/main" xmlns:r="http://schemas.openxmlformats.org/officeDocument/2006/relationships" xmlns:p="http://schemas.openxmlformats.org/presentationml/2006/main">
   <p:cSld>
     <p:spTree>
@@ -8481,7 +9231,7 @@
 </p:sld>
 </file>
 
-<file path=ppt/slides/slide19.xml><?xml version="1.0" encoding="utf-8"?>
+<file path=ppt/slides/slide23.xml><?xml version="1.0" encoding="utf-8"?>
 <p:sld xmlns:a="http://schemas.openxmlformats.org/drawingml/2006/main" xmlns:r="http://schemas.openxmlformats.org/officeDocument/2006/relationships" xmlns:p="http://schemas.openxmlformats.org/presentationml/2006/main">
   <p:cSld>
     <p:spTree>
@@ -8550,13 +9300,20 @@
         </p:spPr>
         <p:txBody>
           <a:bodyPr>
-            <a:normAutofit lnSpcReduction="10000"/>
+            <a:normAutofit fontScale="92500" lnSpcReduction="10000"/>
           </a:bodyPr>
           <a:lstStyle/>
           <a:p>
             <a:r>
               <a:rPr lang="en-US" dirty="0"/>
               <a:t>One-hot encoding is common and works well in most cases. </a:t>
+            </a:r>
+          </a:p>
+          <a:p>
+            <a:pPr lvl="1"/>
+            <a:r>
+              <a:rPr lang="en-US" dirty="0"/>
+              <a:t>I can’t think of one-hot ever ‘breaking’ things, may be suboptimal. </a:t>
             </a:r>
           </a:p>
           <a:p>
@@ -8674,90 +9431,7 @@
 </p:sld>
 </file>
 
-<file path=ppt/slides/slide2.xml><?xml version="1.0" encoding="utf-8"?>
-<p:sld xmlns:a="http://schemas.openxmlformats.org/drawingml/2006/main" xmlns:r="http://schemas.openxmlformats.org/officeDocument/2006/relationships" xmlns:p="http://schemas.openxmlformats.org/presentationml/2006/main">
-  <p:cSld>
-    <p:spTree>
-      <p:nvGrpSpPr>
-        <p:cNvPr id="1" name=""/>
-        <p:cNvGrpSpPr/>
-        <p:nvPr/>
-      </p:nvGrpSpPr>
-      <p:grpSpPr>
-        <a:xfrm>
-          <a:off x="0" y="0"/>
-          <a:ext cx="0" cy="0"/>
-          <a:chOff x="0" y="0"/>
-          <a:chExt cx="0" cy="0"/>
-        </a:xfrm>
-      </p:grpSpPr>
-      <p:sp>
-        <p:nvSpPr>
-          <p:cNvPr id="2" name="Title 1">
-            <a:extLst>
-              <a:ext uri="{FF2B5EF4-FFF2-40B4-BE49-F238E27FC236}">
-                <a16:creationId xmlns:a16="http://schemas.microsoft.com/office/drawing/2014/main" id="{62BA7CB4-C1E2-7903-5C47-8116D048EEA1}"/>
-              </a:ext>
-            </a:extLst>
-          </p:cNvPr>
-          <p:cNvSpPr>
-            <a:spLocks noGrp="1"/>
-          </p:cNvSpPr>
-          <p:nvPr>
-            <p:ph type="ctrTitle"/>
-          </p:nvPr>
-        </p:nvSpPr>
-        <p:spPr/>
-        <p:txBody>
-          <a:bodyPr/>
-          <a:lstStyle/>
-          <a:p>
-            <a:r>
-              <a:rPr lang="en-US" dirty="0"/>
-              <a:t>Categorical data and Encoding</a:t>
-            </a:r>
-          </a:p>
-        </p:txBody>
-      </p:sp>
-      <p:sp>
-        <p:nvSpPr>
-          <p:cNvPr id="3" name="Subtitle 2">
-            <a:extLst>
-              <a:ext uri="{FF2B5EF4-FFF2-40B4-BE49-F238E27FC236}">
-                <a16:creationId xmlns:a16="http://schemas.microsoft.com/office/drawing/2014/main" id="{3FAE5C50-270E-D4A9-E3E7-63F3B4449C80}"/>
-              </a:ext>
-            </a:extLst>
-          </p:cNvPr>
-          <p:cNvSpPr>
-            <a:spLocks noGrp="1"/>
-          </p:cNvSpPr>
-          <p:nvPr>
-            <p:ph type="subTitle" idx="1"/>
-          </p:nvPr>
-        </p:nvSpPr>
-        <p:spPr/>
-        <p:txBody>
-          <a:bodyPr/>
-          <a:lstStyle/>
-          <a:p>
-            <a:endParaRPr lang="en-US"/>
-          </a:p>
-        </p:txBody>
-      </p:sp>
-    </p:spTree>
-    <p:extLst>
-      <p:ext uri="{BB962C8B-B14F-4D97-AF65-F5344CB8AC3E}">
-        <p14:creationId xmlns:p14="http://schemas.microsoft.com/office/powerpoint/2010/main" val="3204280037"/>
-      </p:ext>
-    </p:extLst>
-  </p:cSld>
-  <p:clrMapOvr>
-    <a:masterClrMapping/>
-  </p:clrMapOvr>
-</p:sld>
-</file>
-
-<file path=ppt/slides/slide20.xml><?xml version="1.0" encoding="utf-8"?>
+<file path=ppt/slides/slide24.xml><?xml version="1.0" encoding="utf-8"?>
 <p:sld xmlns:a="http://schemas.openxmlformats.org/drawingml/2006/main" xmlns:r="http://schemas.openxmlformats.org/officeDocument/2006/relationships" xmlns:p="http://schemas.openxmlformats.org/presentationml/2006/main">
   <p:cSld>
     <p:spTree>
@@ -8995,7 +9669,7 @@
 </p:sld>
 </file>
 
-<file path=ppt/slides/slide21.xml><?xml version="1.0" encoding="utf-8"?>
+<file path=ppt/slides/slide25.xml><?xml version="1.0" encoding="utf-8"?>
 <p:sld xmlns:a="http://schemas.openxmlformats.org/drawingml/2006/main" xmlns:r="http://schemas.openxmlformats.org/officeDocument/2006/relationships" xmlns:p="http://schemas.openxmlformats.org/presentationml/2006/main">
   <p:cSld>
     <p:spTree>
@@ -9131,7 +9805,7 @@
 </p:sld>
 </file>
 
-<file path=ppt/slides/slide22.xml><?xml version="1.0" encoding="utf-8"?>
+<file path=ppt/slides/slide26.xml><?xml version="1.0" encoding="utf-8"?>
 <p:sld xmlns:a="http://schemas.openxmlformats.org/drawingml/2006/main" xmlns:r="http://schemas.openxmlformats.org/officeDocument/2006/relationships" xmlns:p="http://schemas.openxmlformats.org/presentationml/2006/main">
   <p:cSld>
     <p:spTree>
@@ -9304,7 +9978,7 @@
 </p:sld>
 </file>
 
-<file path=ppt/slides/slide23.xml><?xml version="1.0" encoding="utf-8"?>
+<file path=ppt/slides/slide27.xml><?xml version="1.0" encoding="utf-8"?>
 <p:sld xmlns:a="http://schemas.openxmlformats.org/drawingml/2006/main" xmlns:r="http://schemas.openxmlformats.org/officeDocument/2006/relationships" xmlns:p="http://schemas.openxmlformats.org/presentationml/2006/main">
   <p:cSld>
     <p:spTree>
@@ -9377,7 +10051,14 @@
           <a:p>
             <a:r>
               <a:rPr lang="en-US" dirty="0"/>
-              <a:t>In practice, we usually use a train-test split function to do this. </a:t>
+              <a:t>In practice, we usually use a train-test split function to do this.</a:t>
+            </a:r>
+          </a:p>
+          <a:p>
+            <a:pPr lvl="1"/>
+            <a:r>
+              <a:rPr lang="en-US" dirty="0"/>
+              <a:t>Randomly subsets the data.  </a:t>
             </a:r>
           </a:p>
           <a:p>
@@ -9421,11 +10102,58 @@
           <a:p>
             <a:r>
               <a:rPr lang="en-US" dirty="0"/>
-              <a:t>If this makes sense, you can skip 022, we’ll revisit it in January. </a:t>
+              <a:t>If this makes sense, you can skip 022, we’ll revisit it in January, there’s a few variations. </a:t>
             </a:r>
           </a:p>
         </p:txBody>
       </p:sp>
+      <p:pic>
+        <p:nvPicPr>
+          <p:cNvPr id="2050" name="Picture 2" descr="K Fold Cross-Validation in Machine Learning? How does K Fold Work?">
+            <a:extLst>
+              <a:ext uri="{FF2B5EF4-FFF2-40B4-BE49-F238E27FC236}">
+                <a16:creationId xmlns:a16="http://schemas.microsoft.com/office/drawing/2014/main" id="{34366170-1FA1-AFBA-FFE6-8CB6D5AA41A6}"/>
+              </a:ext>
+            </a:extLst>
+          </p:cNvPr>
+          <p:cNvPicPr>
+            <a:picLocks noChangeAspect="1" noChangeArrowheads="1"/>
+          </p:cNvPicPr>
+          <p:nvPr/>
+        </p:nvPicPr>
+        <p:blipFill>
+          <a:blip r:embed="rId2">
+            <a:extLst>
+              <a:ext uri="{28A0092B-C50C-407E-A947-70E740481C1C}">
+                <a14:useLocalDpi xmlns:a14="http://schemas.microsoft.com/office/drawing/2010/main" val="0"/>
+              </a:ext>
+            </a:extLst>
+          </a:blip>
+          <a:srcRect/>
+          <a:stretch>
+            <a:fillRect/>
+          </a:stretch>
+        </p:blipFill>
+        <p:spPr bwMode="auto">
+          <a:xfrm>
+            <a:off x="9214883" y="1853754"/>
+            <a:ext cx="3388241" cy="2541181"/>
+          </a:xfrm>
+          <a:prstGeom prst="rect">
+            <a:avLst/>
+          </a:prstGeom>
+          <a:noFill/>
+          <a:extLst>
+            <a:ext uri="{909E8E84-426E-40DD-AFC4-6F175D3DCCD1}">
+              <a14:hiddenFill xmlns:a14="http://schemas.microsoft.com/office/drawing/2010/main">
+                <a:solidFill>
+                  <a:srgbClr val="FFFFFF"/>
+                </a:solidFill>
+              </a14:hiddenFill>
+            </a:ext>
+          </a:extLst>
+        </p:spPr>
+      </p:pic>
     </p:spTree>
     <p:extLst>
       <p:ext uri="{BB962C8B-B14F-4D97-AF65-F5344CB8AC3E}">
@@ -9439,7 +10167,87 @@
 </p:sld>
 </file>
 
-<file path=ppt/slides/slide24.xml><?xml version="1.0" encoding="utf-8"?>
+<file path=ppt/slides/slide28.xml><?xml version="1.0" encoding="utf-8"?>
+<p:sld xmlns:a="http://schemas.openxmlformats.org/drawingml/2006/main" xmlns:r="http://schemas.openxmlformats.org/officeDocument/2006/relationships" xmlns:p="http://schemas.openxmlformats.org/presentationml/2006/main" show="0">
+  <p:cSld>
+    <p:spTree>
+      <p:nvGrpSpPr>
+        <p:cNvPr id="1" name=""/>
+        <p:cNvGrpSpPr/>
+        <p:nvPr/>
+      </p:nvGrpSpPr>
+      <p:grpSpPr>
+        <a:xfrm>
+          <a:off x="0" y="0"/>
+          <a:ext cx="0" cy="0"/>
+          <a:chOff x="0" y="0"/>
+          <a:chExt cx="0" cy="0"/>
+        </a:xfrm>
+      </p:grpSpPr>
+      <p:sp>
+        <p:nvSpPr>
+          <p:cNvPr id="2" name="Title 1">
+            <a:extLst>
+              <a:ext uri="{FF2B5EF4-FFF2-40B4-BE49-F238E27FC236}">
+                <a16:creationId xmlns:a16="http://schemas.microsoft.com/office/drawing/2014/main" id="{EF103415-A570-01F5-FE4C-AFA01DB8AA0D}"/>
+              </a:ext>
+            </a:extLst>
+          </p:cNvPr>
+          <p:cNvSpPr>
+            <a:spLocks noGrp="1"/>
+          </p:cNvSpPr>
+          <p:nvPr>
+            <p:ph type="title"/>
+          </p:nvPr>
+        </p:nvSpPr>
+        <p:spPr/>
+        <p:txBody>
+          <a:bodyPr/>
+          <a:lstStyle/>
+          <a:p>
+            <a:endParaRPr lang="en-US"/>
+          </a:p>
+        </p:txBody>
+      </p:sp>
+      <p:sp>
+        <p:nvSpPr>
+          <p:cNvPr id="3" name="Content Placeholder 2">
+            <a:extLst>
+              <a:ext uri="{FF2B5EF4-FFF2-40B4-BE49-F238E27FC236}">
+                <a16:creationId xmlns:a16="http://schemas.microsoft.com/office/drawing/2014/main" id="{62DF224C-8021-F8FB-AEDE-5D68A4642689}"/>
+              </a:ext>
+            </a:extLst>
+          </p:cNvPr>
+          <p:cNvSpPr>
+            <a:spLocks noGrp="1"/>
+          </p:cNvSpPr>
+          <p:nvPr>
+            <p:ph idx="1"/>
+          </p:nvPr>
+        </p:nvSpPr>
+        <p:spPr/>
+        <p:txBody>
+          <a:bodyPr/>
+          <a:lstStyle/>
+          <a:p>
+            <a:endParaRPr lang="en-US"/>
+          </a:p>
+        </p:txBody>
+      </p:sp>
+    </p:spTree>
+    <p:extLst>
+      <p:ext uri="{BB962C8B-B14F-4D97-AF65-F5344CB8AC3E}">
+        <p14:creationId xmlns:p14="http://schemas.microsoft.com/office/powerpoint/2010/main" val="2379346035"/>
+      </p:ext>
+    </p:extLst>
+  </p:cSld>
+  <p:clrMapOvr>
+    <a:masterClrMapping/>
+  </p:clrMapOvr>
+</p:sld>
+</file>
+
+<file path=ppt/slides/slide29.xml><?xml version="1.0" encoding="utf-8"?>
 <p:sld xmlns:a="http://schemas.openxmlformats.org/drawingml/2006/main" xmlns:r="http://schemas.openxmlformats.org/officeDocument/2006/relationships" xmlns:p="http://schemas.openxmlformats.org/presentationml/2006/main">
   <p:cSld>
     <p:spTree>
@@ -9479,7 +10287,15 @@
           <a:p>
             <a:r>
               <a:rPr lang="en-US" dirty="0"/>
-              <a:t>Encoding and Categorical Features</a:t>
+              <a:t>Prep </a:t>
+            </a:r>
+            <a:r>
+              <a:rPr lang="en-US" dirty="0" err="1"/>
+              <a:t>Yo</a:t>
+            </a:r>
+            <a:r>
+              <a:rPr lang="en-US" dirty="0"/>
+              <a:t>’ Data</a:t>
             </a:r>
           </a:p>
         </p:txBody>
@@ -9518,16 +10334,10 @@
             </a:r>
           </a:p>
           <a:p>
-            <a:r>
-              <a:rPr lang="en-US" dirty="0"/>
-              <a:t>Categoric features are useful, but must be transformed to numbers. </a:t>
-            </a:r>
-          </a:p>
-          <a:p>
             <a:pPr lvl="1"/>
             <a:r>
               <a:rPr lang="en-US" dirty="0"/>
-              <a:t>Algorithms (with few exceptions) need numbers. </a:t>
+              <a:t>Categoric features are useful but must be transformed to numbers. </a:t>
             </a:r>
           </a:p>
           <a:p>
@@ -9553,27 +10363,32 @@
           <a:p>
             <a:r>
               <a:rPr lang="en-US" dirty="0"/>
+              <a:t>Different encodings rarely make a massive difference, but it does matter. </a:t>
+            </a:r>
+          </a:p>
+          <a:p>
+            <a:pPr lvl="1"/>
+            <a:r>
+              <a:rPr lang="en-US" dirty="0"/>
+              <a:t>Ideally data should model reality as accurately as possible, so we aim to do that. </a:t>
+            </a:r>
+          </a:p>
+          <a:p>
+            <a:r>
+              <a:rPr lang="en-US" dirty="0"/>
               <a:t>Dropping one of the one-hot columns is common. </a:t>
             </a:r>
           </a:p>
           <a:p>
-            <a:pPr lvl="1"/>
-            <a:r>
-              <a:rPr lang="en-US" dirty="0"/>
-              <a:t>Data is technically more correct, not introducing impossible state. </a:t>
-            </a:r>
-          </a:p>
-          <a:p>
-            <a:pPr lvl="1"/>
-            <a:r>
-              <a:rPr lang="en-US" dirty="0"/>
-              <a:t>Helps with fit, especially as data grows. </a:t>
-            </a:r>
-          </a:p>
-          <a:p>
-            <a:r>
-              <a:rPr lang="en-US" dirty="0"/>
-              <a:t>Generally comes at/near end of prep – we usually have several steps to do…</a:t>
+            <a:r>
+              <a:rPr lang="en-US" dirty="0"/>
+              <a:t>Generally, comes at/near end of prep – we usually have several steps to do…</a:t>
+            </a:r>
+          </a:p>
+          <a:p>
+            <a:r>
+              <a:rPr lang="en-US" dirty="0"/>
+              <a:t>We split the data – some is used to build model, remainder is held to test. </a:t>
             </a:r>
           </a:p>
         </p:txBody>
@@ -9654,8 +10469,8 @@
         </p:nvSpPr>
         <p:spPr>
           <a:xfrm>
-            <a:off x="1451579" y="1956391"/>
-            <a:ext cx="9603275" cy="4019107"/>
+            <a:off x="1038687" y="1956391"/>
+            <a:ext cx="10016167" cy="4019107"/>
           </a:xfrm>
         </p:spPr>
         <p:txBody>
@@ -9688,6 +10503,13 @@
             </a:r>
           </a:p>
           <a:p>
+            <a:pPr lvl="1"/>
+            <a:r>
+              <a:rPr lang="en-US" dirty="0"/>
+              <a:t>Inversely related to MSE value. </a:t>
+            </a:r>
+          </a:p>
+          <a:p>
             <a:r>
               <a:rPr lang="en-US" dirty="0"/>
               <a:t>R squared is:</a:t>
@@ -9716,6 +10538,53 @@
           </a:p>
         </p:txBody>
       </p:sp>
+      <p:pic>
+        <p:nvPicPr>
+          <p:cNvPr id="4098" name="Picture 2" descr="R-Squared: Definition, Calculation, and Interpretation">
+            <a:extLst>
+              <a:ext uri="{FF2B5EF4-FFF2-40B4-BE49-F238E27FC236}">
+                <a16:creationId xmlns:a16="http://schemas.microsoft.com/office/drawing/2014/main" id="{2822EA14-1E29-0F63-0707-0229109EAC7D}"/>
+              </a:ext>
+            </a:extLst>
+          </p:cNvPr>
+          <p:cNvPicPr>
+            <a:picLocks noChangeAspect="1" noChangeArrowheads="1"/>
+          </p:cNvPicPr>
+          <p:nvPr/>
+        </p:nvPicPr>
+        <p:blipFill rotWithShape="1">
+          <a:blip r:embed="rId2">
+            <a:extLst>
+              <a:ext uri="{28A0092B-C50C-407E-A947-70E740481C1C}">
+                <a14:useLocalDpi xmlns:a14="http://schemas.microsoft.com/office/drawing/2010/main" val="0"/>
+              </a:ext>
+            </a:extLst>
+          </a:blip>
+          <a:srcRect t="6601" b="15600"/>
+          <a:stretch>
+            <a:fillRect/>
+          </a:stretch>
+        </p:blipFill>
+        <p:spPr bwMode="auto">
+          <a:xfrm>
+            <a:off x="6623362" y="1956391"/>
+            <a:ext cx="5477272" cy="2840855"/>
+          </a:xfrm>
+          <a:prstGeom prst="rect">
+            <a:avLst/>
+          </a:prstGeom>
+          <a:noFill/>
+          <a:extLst>
+            <a:ext uri="{909E8E84-426E-40DD-AFC4-6F175D3DCCD1}">
+              <a14:hiddenFill xmlns:a14="http://schemas.microsoft.com/office/drawing/2010/main">
+                <a:solidFill>
+                  <a:srgbClr val="FFFFFF"/>
+                </a:solidFill>
+              </a14:hiddenFill>
+            </a:ext>
+          </a:extLst>
+        </p:spPr>
+      </p:pic>
     </p:spTree>
     <p:extLst>
       <p:ext uri="{BB962C8B-B14F-4D97-AF65-F5344CB8AC3E}">
@@ -9730,6 +10599,136 @@
 </file>
 
 <file path=ppt/slides/slide4.xml><?xml version="1.0" encoding="utf-8"?>
+<p:sld xmlns:a="http://schemas.openxmlformats.org/drawingml/2006/main" xmlns:r="http://schemas.openxmlformats.org/officeDocument/2006/relationships" xmlns:p="http://schemas.openxmlformats.org/presentationml/2006/main">
+  <p:cSld>
+    <p:spTree>
+      <p:nvGrpSpPr>
+        <p:cNvPr id="1" name=""/>
+        <p:cNvGrpSpPr/>
+        <p:nvPr/>
+      </p:nvGrpSpPr>
+      <p:grpSpPr>
+        <a:xfrm>
+          <a:off x="0" y="0"/>
+          <a:ext cx="0" cy="0"/>
+          <a:chOff x="0" y="0"/>
+          <a:chExt cx="0" cy="0"/>
+        </a:xfrm>
+      </p:grpSpPr>
+      <p:sp>
+        <p:nvSpPr>
+          <p:cNvPr id="2" name="Title 1">
+            <a:extLst>
+              <a:ext uri="{FF2B5EF4-FFF2-40B4-BE49-F238E27FC236}">
+                <a16:creationId xmlns:a16="http://schemas.microsoft.com/office/drawing/2014/main" id="{55431E63-5F4D-45DD-2D2B-B23B6D66CEAF}"/>
+              </a:ext>
+            </a:extLst>
+          </p:cNvPr>
+          <p:cNvSpPr>
+            <a:spLocks noGrp="1"/>
+          </p:cNvSpPr>
+          <p:nvPr>
+            <p:ph type="title"/>
+          </p:nvPr>
+        </p:nvSpPr>
+        <p:spPr/>
+        <p:txBody>
+          <a:bodyPr/>
+          <a:lstStyle/>
+          <a:p>
+            <a:r>
+              <a:rPr lang="en-US" dirty="0"/>
+              <a:t>Make it Fit!</a:t>
+            </a:r>
+          </a:p>
+        </p:txBody>
+      </p:sp>
+      <p:sp>
+        <p:nvSpPr>
+          <p:cNvPr id="3" name="Content Placeholder 2">
+            <a:extLst>
+              <a:ext uri="{FF2B5EF4-FFF2-40B4-BE49-F238E27FC236}">
+                <a16:creationId xmlns:a16="http://schemas.microsoft.com/office/drawing/2014/main" id="{434D1D34-18FF-3978-6AC6-F97AF3B43D33}"/>
+              </a:ext>
+            </a:extLst>
+          </p:cNvPr>
+          <p:cNvSpPr>
+            <a:spLocks noGrp="1"/>
+          </p:cNvSpPr>
+          <p:nvPr>
+            <p:ph idx="1"/>
+          </p:nvPr>
+        </p:nvSpPr>
+        <p:spPr/>
+        <p:txBody>
+          <a:bodyPr/>
+          <a:lstStyle/>
+          <a:p>
+            <a:endParaRPr lang="en-US"/>
+          </a:p>
+        </p:txBody>
+      </p:sp>
+      <p:pic>
+        <p:nvPicPr>
+          <p:cNvPr id="3074" name="Picture 2" descr="R-squared in Linear Regression Models: Concepts, Examples">
+            <a:extLst>
+              <a:ext uri="{FF2B5EF4-FFF2-40B4-BE49-F238E27FC236}">
+                <a16:creationId xmlns:a16="http://schemas.microsoft.com/office/drawing/2014/main" id="{2F0A5985-A84C-7840-252A-CEBF8EC4B57D}"/>
+              </a:ext>
+            </a:extLst>
+          </p:cNvPr>
+          <p:cNvPicPr>
+            <a:picLocks noChangeAspect="1" noChangeArrowheads="1"/>
+          </p:cNvPicPr>
+          <p:nvPr/>
+        </p:nvPicPr>
+        <p:blipFill>
+          <a:blip r:embed="rId2">
+            <a:extLst>
+              <a:ext uri="{28A0092B-C50C-407E-A947-70E740481C1C}">
+                <a14:useLocalDpi xmlns:a14="http://schemas.microsoft.com/office/drawing/2010/main" val="0"/>
+              </a:ext>
+            </a:extLst>
+          </a:blip>
+          <a:srcRect/>
+          <a:stretch>
+            <a:fillRect/>
+          </a:stretch>
+        </p:blipFill>
+        <p:spPr bwMode="auto">
+          <a:xfrm>
+            <a:off x="0" y="1883118"/>
+            <a:ext cx="12192000" cy="4170363"/>
+          </a:xfrm>
+          <a:prstGeom prst="rect">
+            <a:avLst/>
+          </a:prstGeom>
+          <a:noFill/>
+          <a:extLst>
+            <a:ext uri="{909E8E84-426E-40DD-AFC4-6F175D3DCCD1}">
+              <a14:hiddenFill xmlns:a14="http://schemas.microsoft.com/office/drawing/2010/main">
+                <a:solidFill>
+                  <a:srgbClr val="FFFFFF"/>
+                </a:solidFill>
+              </a14:hiddenFill>
+            </a:ext>
+          </a:extLst>
+        </p:spPr>
+      </p:pic>
+    </p:spTree>
+    <p:extLst>
+      <p:ext uri="{BB962C8B-B14F-4D97-AF65-F5344CB8AC3E}">
+        <p14:creationId xmlns:p14="http://schemas.microsoft.com/office/powerpoint/2010/main" val="1853270555"/>
+      </p:ext>
+    </p:extLst>
+  </p:cSld>
+  <p:clrMapOvr>
+    <a:masterClrMapping/>
+  </p:clrMapOvr>
+</p:sld>
+</file>
+
+<file path=ppt/slides/slide5.xml><?xml version="1.0" encoding="utf-8"?>
 <p:sld xmlns:a="http://schemas.openxmlformats.org/drawingml/2006/main" xmlns:r="http://schemas.openxmlformats.org/officeDocument/2006/relationships" xmlns:p="http://schemas.openxmlformats.org/presentationml/2006/main">
   <p:cSld>
     <p:spTree>
@@ -9802,8 +10801,8 @@
             <a:chExt cx="5501160" cy="2985840"/>
           </a:xfrm>
         </p:grpSpPr>
-        <mc:AlternateContent xmlns:mc="http://schemas.openxmlformats.org/markup-compatibility/2006">
-          <mc:Choice xmlns:p14="http://schemas.microsoft.com/office/powerpoint/2010/main" Requires="p14">
+        <mc:AlternateContent xmlns:mc="http://schemas.openxmlformats.org/markup-compatibility/2006" xmlns:p14="http://schemas.microsoft.com/office/powerpoint/2010/main">
+          <mc:Choice Requires="p14">
             <p:contentPart p14:bwMode="auto" r:id="rId2">
               <p14:nvContentPartPr>
                 <p14:cNvPr id="7" name="Ink 6">
@@ -9822,7 +10821,7 @@
               </p14:xfrm>
             </p:contentPart>
           </mc:Choice>
-          <mc:Fallback>
+          <mc:Fallback xmlns="">
             <p:pic>
               <p:nvPicPr>
                 <p:cNvPr id="7" name="Ink 6">
@@ -9853,8 +10852,8 @@
             </p:pic>
           </mc:Fallback>
         </mc:AlternateContent>
-        <mc:AlternateContent xmlns:mc="http://schemas.openxmlformats.org/markup-compatibility/2006">
-          <mc:Choice xmlns:p14="http://schemas.microsoft.com/office/powerpoint/2010/main" Requires="p14">
+        <mc:AlternateContent xmlns:mc="http://schemas.openxmlformats.org/markup-compatibility/2006" xmlns:p14="http://schemas.microsoft.com/office/powerpoint/2010/main">
+          <mc:Choice Requires="p14">
             <p:contentPart p14:bwMode="auto" r:id="rId4">
               <p14:nvContentPartPr>
                 <p14:cNvPr id="8" name="Ink 7">
@@ -9873,7 +10872,7 @@
               </p14:xfrm>
             </p:contentPart>
           </mc:Choice>
-          <mc:Fallback>
+          <mc:Fallback xmlns="">
             <p:pic>
               <p:nvPicPr>
                 <p:cNvPr id="8" name="Ink 7">
@@ -9946,7 +10945,7 @@
             </p:blipFill>
             <p:spPr>
               <a:xfrm>
-                <a:off x="1537384" y="4001124"/>
+                <a:off x="1537384" y="4000764"/>
                 <a:ext cx="54720" cy="75240"/>
               </a:xfrm>
               <a:prstGeom prst="rect">
@@ -9997,7 +10996,7 @@
             </p:blipFill>
             <p:spPr>
               <a:xfrm>
-                <a:off x="1919704" y="4334124"/>
+                <a:off x="1919344" y="4333764"/>
                 <a:ext cx="125640" cy="89640"/>
               </a:xfrm>
               <a:prstGeom prst="rect">
@@ -10048,8 +11047,8 @@
             </p:blipFill>
             <p:spPr>
               <a:xfrm>
-                <a:off x="2489584" y="3250524"/>
-                <a:ext cx="59760" cy="156240"/>
+                <a:off x="2489584" y="3250578"/>
+                <a:ext cx="59760" cy="156134"/>
               </a:xfrm>
               <a:prstGeom prst="rect">
                 <a:avLst/>
@@ -10099,7 +11098,7 @@
             </p:blipFill>
             <p:spPr>
               <a:xfrm>
-                <a:off x="2268544" y="3995364"/>
+                <a:off x="2268184" y="3995364"/>
                 <a:ext cx="81360" cy="105840"/>
               </a:xfrm>
               <a:prstGeom prst="rect">
@@ -10150,7 +11149,7 @@
             </p:blipFill>
             <p:spPr>
               <a:xfrm>
-                <a:off x="3363304" y="3046044"/>
+                <a:off x="3363304" y="3045684"/>
                 <a:ext cx="132840" cy="122040"/>
               </a:xfrm>
               <a:prstGeom prst="rect">
@@ -10201,7 +11200,7 @@
             </p:blipFill>
             <p:spPr>
               <a:xfrm>
-                <a:off x="3162064" y="2337564"/>
+                <a:off x="3161704" y="2337564"/>
                 <a:ext cx="133200" cy="114120"/>
               </a:xfrm>
               <a:prstGeom prst="rect">
@@ -10252,8 +11251,8 @@
             </p:blipFill>
             <p:spPr>
               <a:xfrm>
-                <a:off x="4239544" y="3098244"/>
-                <a:ext cx="78840" cy="96480"/>
+                <a:off x="4239544" y="3097777"/>
+                <a:ext cx="78840" cy="96692"/>
               </a:xfrm>
               <a:prstGeom prst="rect">
                 <a:avLst/>
@@ -10282,8 +11281,8 @@
             <a:chExt cx="2329560" cy="3774600"/>
           </a:xfrm>
         </p:grpSpPr>
-        <mc:AlternateContent xmlns:mc="http://schemas.openxmlformats.org/markup-compatibility/2006">
-          <mc:Choice xmlns:p14="http://schemas.microsoft.com/office/powerpoint/2010/main" Requires="p14">
+        <mc:AlternateContent xmlns:mc="http://schemas.openxmlformats.org/markup-compatibility/2006" xmlns:p14="http://schemas.microsoft.com/office/powerpoint/2010/main">
+          <mc:Choice Requires="p14">
             <p:contentPart p14:bwMode="auto" r:id="rId20">
               <p14:nvContentPartPr>
                 <p14:cNvPr id="18" name="Ink 17">
@@ -10302,7 +11301,7 @@
               </p14:xfrm>
             </p:contentPart>
           </mc:Choice>
-          <mc:Fallback>
+          <mc:Fallback xmlns="">
             <p:pic>
               <p:nvPicPr>
                 <p:cNvPr id="18" name="Ink 17">
@@ -10333,8 +11332,8 @@
             </p:pic>
           </mc:Fallback>
         </mc:AlternateContent>
-        <mc:AlternateContent xmlns:mc="http://schemas.openxmlformats.org/markup-compatibility/2006">
-          <mc:Choice xmlns:p14="http://schemas.microsoft.com/office/powerpoint/2010/main" Requires="p14">
+        <mc:AlternateContent xmlns:mc="http://schemas.openxmlformats.org/markup-compatibility/2006" xmlns:p14="http://schemas.microsoft.com/office/powerpoint/2010/main">
+          <mc:Choice Requires="p14">
             <p:contentPart p14:bwMode="auto" r:id="rId22">
               <p14:nvContentPartPr>
                 <p14:cNvPr id="19" name="Ink 18">
@@ -10353,7 +11352,7 @@
               </p14:xfrm>
             </p:contentPart>
           </mc:Choice>
-          <mc:Fallback>
+          <mc:Fallback xmlns="">
             <p:pic>
               <p:nvPicPr>
                 <p:cNvPr id="19" name="Ink 18">
@@ -10405,8 +11404,8 @@
             <a:chExt cx="128880" cy="520200"/>
           </a:xfrm>
         </p:grpSpPr>
-        <mc:AlternateContent xmlns:mc="http://schemas.openxmlformats.org/markup-compatibility/2006">
-          <mc:Choice xmlns:p14="http://schemas.microsoft.com/office/powerpoint/2010/main" Requires="p14">
+        <mc:AlternateContent xmlns:mc="http://schemas.openxmlformats.org/markup-compatibility/2006" xmlns:p14="http://schemas.microsoft.com/office/powerpoint/2010/main">
+          <mc:Choice Requires="p14">
             <p:contentPart p14:bwMode="auto" r:id="rId24">
               <p14:nvContentPartPr>
                 <p14:cNvPr id="22" name="Ink 21">
@@ -10425,7 +11424,7 @@
               </p14:xfrm>
             </p:contentPart>
           </mc:Choice>
-          <mc:Fallback>
+          <mc:Fallback xmlns="">
             <p:pic>
               <p:nvPicPr>
                 <p:cNvPr id="22" name="Ink 21">
@@ -10456,8 +11455,8 @@
             </p:pic>
           </mc:Fallback>
         </mc:AlternateContent>
-        <mc:AlternateContent xmlns:mc="http://schemas.openxmlformats.org/markup-compatibility/2006">
-          <mc:Choice xmlns:p14="http://schemas.microsoft.com/office/powerpoint/2010/main" Requires="p14">
+        <mc:AlternateContent xmlns:mc="http://schemas.openxmlformats.org/markup-compatibility/2006" xmlns:p14="http://schemas.microsoft.com/office/powerpoint/2010/main">
+          <mc:Choice Requires="p14">
             <p:contentPart p14:bwMode="auto" r:id="rId26">
               <p14:nvContentPartPr>
                 <p14:cNvPr id="23" name="Ink 22">
@@ -10476,7 +11475,7 @@
               </p14:xfrm>
             </p:contentPart>
           </mc:Choice>
-          <mc:Fallback>
+          <mc:Fallback xmlns="">
             <p:pic>
               <p:nvPicPr>
                 <p:cNvPr id="23" name="Ink 22">
@@ -10507,8 +11506,8 @@
             </p:pic>
           </mc:Fallback>
         </mc:AlternateContent>
-        <mc:AlternateContent xmlns:mc="http://schemas.openxmlformats.org/markup-compatibility/2006">
-          <mc:Choice xmlns:p14="http://schemas.microsoft.com/office/powerpoint/2010/main" Requires="p14">
+        <mc:AlternateContent xmlns:mc="http://schemas.openxmlformats.org/markup-compatibility/2006" xmlns:p14="http://schemas.microsoft.com/office/powerpoint/2010/main">
+          <mc:Choice Requires="p14">
             <p:contentPart p14:bwMode="auto" r:id="rId28">
               <p14:nvContentPartPr>
                 <p14:cNvPr id="24" name="Ink 23">
@@ -10527,7 +11526,7 @@
               </p14:xfrm>
             </p:contentPart>
           </mc:Choice>
-          <mc:Fallback>
+          <mc:Fallback xmlns="">
             <p:pic>
               <p:nvPicPr>
                 <p:cNvPr id="24" name="Ink 23">
@@ -10559,8 +11558,8 @@
           </mc:Fallback>
         </mc:AlternateContent>
       </p:grpSp>
-      <mc:AlternateContent xmlns:mc="http://schemas.openxmlformats.org/markup-compatibility/2006">
-        <mc:Choice xmlns:p14="http://schemas.microsoft.com/office/powerpoint/2010/main" Requires="p14">
+      <mc:AlternateContent xmlns:mc="http://schemas.openxmlformats.org/markup-compatibility/2006" xmlns:p14="http://schemas.microsoft.com/office/powerpoint/2010/main">
+        <mc:Choice Requires="p14">
           <p:contentPart p14:bwMode="auto" r:id="rId30">
             <p14:nvContentPartPr>
               <p14:cNvPr id="32" name="Ink 31">
@@ -10579,7 +11578,7 @@
             </p14:xfrm>
           </p:contentPart>
         </mc:Choice>
-        <mc:Fallback>
+        <mc:Fallback xmlns="">
           <p:pic>
             <p:nvPicPr>
               <p:cNvPr id="32" name="Ink 31">
@@ -10630,8 +11629,8 @@
             <a:chExt cx="2102040" cy="599040"/>
           </a:xfrm>
         </p:grpSpPr>
-        <mc:AlternateContent xmlns:mc="http://schemas.openxmlformats.org/markup-compatibility/2006">
-          <mc:Choice xmlns:p14="http://schemas.microsoft.com/office/powerpoint/2010/main" Requires="p14">
+        <mc:AlternateContent xmlns:mc="http://schemas.openxmlformats.org/markup-compatibility/2006" xmlns:p14="http://schemas.microsoft.com/office/powerpoint/2010/main">
+          <mc:Choice Requires="p14">
             <p:contentPart p14:bwMode="auto" r:id="rId32">
               <p14:nvContentPartPr>
                 <p14:cNvPr id="27" name="Ink 26">
@@ -10650,7 +11649,7 @@
               </p14:xfrm>
             </p:contentPart>
           </mc:Choice>
-          <mc:Fallback>
+          <mc:Fallback xmlns="">
             <p:pic>
               <p:nvPicPr>
                 <p:cNvPr id="27" name="Ink 26">
@@ -10681,8 +11680,8 @@
             </p:pic>
           </mc:Fallback>
         </mc:AlternateContent>
-        <mc:AlternateContent xmlns:mc="http://schemas.openxmlformats.org/markup-compatibility/2006">
-          <mc:Choice xmlns:p14="http://schemas.microsoft.com/office/powerpoint/2010/main" Requires="p14">
+        <mc:AlternateContent xmlns:mc="http://schemas.openxmlformats.org/markup-compatibility/2006" xmlns:p14="http://schemas.microsoft.com/office/powerpoint/2010/main">
+          <mc:Choice Requires="p14">
             <p:contentPart p14:bwMode="auto" r:id="rId34">
               <p14:nvContentPartPr>
                 <p14:cNvPr id="28" name="Ink 27">
@@ -10701,7 +11700,7 @@
               </p14:xfrm>
             </p:contentPart>
           </mc:Choice>
-          <mc:Fallback>
+          <mc:Fallback xmlns="">
             <p:pic>
               <p:nvPicPr>
                 <p:cNvPr id="28" name="Ink 27">
@@ -10732,8 +11731,8 @@
             </p:pic>
           </mc:Fallback>
         </mc:AlternateContent>
-        <mc:AlternateContent xmlns:mc="http://schemas.openxmlformats.org/markup-compatibility/2006">
-          <mc:Choice xmlns:p14="http://schemas.microsoft.com/office/powerpoint/2010/main" Requires="p14">
+        <mc:AlternateContent xmlns:mc="http://schemas.openxmlformats.org/markup-compatibility/2006" xmlns:p14="http://schemas.microsoft.com/office/powerpoint/2010/main">
+          <mc:Choice Requires="p14">
             <p:contentPart p14:bwMode="auto" r:id="rId36">
               <p14:nvContentPartPr>
                 <p14:cNvPr id="29" name="Ink 28">
@@ -10752,7 +11751,7 @@
               </p14:xfrm>
             </p:contentPart>
           </mc:Choice>
-          <mc:Fallback>
+          <mc:Fallback xmlns="">
             <p:pic>
               <p:nvPicPr>
                 <p:cNvPr id="29" name="Ink 28">
@@ -10783,8 +11782,8 @@
             </p:pic>
           </mc:Fallback>
         </mc:AlternateContent>
-        <mc:AlternateContent xmlns:mc="http://schemas.openxmlformats.org/markup-compatibility/2006">
-          <mc:Choice xmlns:p14="http://schemas.microsoft.com/office/powerpoint/2010/main" Requires="p14">
+        <mc:AlternateContent xmlns:mc="http://schemas.openxmlformats.org/markup-compatibility/2006" xmlns:p14="http://schemas.microsoft.com/office/powerpoint/2010/main">
+          <mc:Choice Requires="p14">
             <p:contentPart p14:bwMode="auto" r:id="rId38">
               <p14:nvContentPartPr>
                 <p14:cNvPr id="33" name="Ink 32">
@@ -10803,7 +11802,7 @@
               </p14:xfrm>
             </p:contentPart>
           </mc:Choice>
-          <mc:Fallback>
+          <mc:Fallback xmlns="">
             <p:pic>
               <p:nvPicPr>
                 <p:cNvPr id="33" name="Ink 32">
@@ -10834,8 +11833,8 @@
             </p:pic>
           </mc:Fallback>
         </mc:AlternateContent>
-        <mc:AlternateContent xmlns:mc="http://schemas.openxmlformats.org/markup-compatibility/2006">
-          <mc:Choice xmlns:p14="http://schemas.microsoft.com/office/powerpoint/2010/main" Requires="p14">
+        <mc:AlternateContent xmlns:mc="http://schemas.openxmlformats.org/markup-compatibility/2006" xmlns:p14="http://schemas.microsoft.com/office/powerpoint/2010/main">
+          <mc:Choice Requires="p14">
             <p:contentPart p14:bwMode="auto" r:id="rId40">
               <p14:nvContentPartPr>
                 <p14:cNvPr id="34" name="Ink 33">
@@ -10854,7 +11853,7 @@
               </p14:xfrm>
             </p:contentPart>
           </mc:Choice>
-          <mc:Fallback>
+          <mc:Fallback xmlns="">
             <p:pic>
               <p:nvPicPr>
                 <p:cNvPr id="34" name="Ink 33">
@@ -10885,8 +11884,8 @@
             </p:pic>
           </mc:Fallback>
         </mc:AlternateContent>
-        <mc:AlternateContent xmlns:mc="http://schemas.openxmlformats.org/markup-compatibility/2006">
-          <mc:Choice xmlns:p14="http://schemas.microsoft.com/office/powerpoint/2010/main" Requires="p14">
+        <mc:AlternateContent xmlns:mc="http://schemas.openxmlformats.org/markup-compatibility/2006" xmlns:p14="http://schemas.microsoft.com/office/powerpoint/2010/main">
+          <mc:Choice Requires="p14">
             <p:contentPart p14:bwMode="auto" r:id="rId42">
               <p14:nvContentPartPr>
                 <p14:cNvPr id="35" name="Ink 34">
@@ -10905,7 +11904,7 @@
               </p14:xfrm>
             </p:contentPart>
           </mc:Choice>
-          <mc:Fallback>
+          <mc:Fallback xmlns="">
             <p:pic>
               <p:nvPicPr>
                 <p:cNvPr id="35" name="Ink 34">
@@ -10936,8 +11935,8 @@
             </p:pic>
           </mc:Fallback>
         </mc:AlternateContent>
-        <mc:AlternateContent xmlns:mc="http://schemas.openxmlformats.org/markup-compatibility/2006">
-          <mc:Choice xmlns:p14="http://schemas.microsoft.com/office/powerpoint/2010/main" Requires="p14">
+        <mc:AlternateContent xmlns:mc="http://schemas.openxmlformats.org/markup-compatibility/2006" xmlns:p14="http://schemas.microsoft.com/office/powerpoint/2010/main">
+          <mc:Choice Requires="p14">
             <p:contentPart p14:bwMode="auto" r:id="rId44">
               <p14:nvContentPartPr>
                 <p14:cNvPr id="36" name="Ink 35">
@@ -10956,7 +11955,7 @@
               </p14:xfrm>
             </p:contentPart>
           </mc:Choice>
-          <mc:Fallback>
+          <mc:Fallback xmlns="">
             <p:pic>
               <p:nvPicPr>
                 <p:cNvPr id="36" name="Ink 35">
@@ -10987,8 +11986,8 @@
             </p:pic>
           </mc:Fallback>
         </mc:AlternateContent>
-        <mc:AlternateContent xmlns:mc="http://schemas.openxmlformats.org/markup-compatibility/2006">
-          <mc:Choice xmlns:p14="http://schemas.microsoft.com/office/powerpoint/2010/main" Requires="p14">
+        <mc:AlternateContent xmlns:mc="http://schemas.openxmlformats.org/markup-compatibility/2006" xmlns:p14="http://schemas.microsoft.com/office/powerpoint/2010/main">
+          <mc:Choice Requires="p14">
             <p:contentPart p14:bwMode="auto" r:id="rId46">
               <p14:nvContentPartPr>
                 <p14:cNvPr id="37" name="Ink 36">
@@ -11007,7 +12006,7 @@
               </p14:xfrm>
             </p:contentPart>
           </mc:Choice>
-          <mc:Fallback>
+          <mc:Fallback xmlns="">
             <p:pic>
               <p:nvPicPr>
                 <p:cNvPr id="37" name="Ink 36">
@@ -11038,8 +12037,8 @@
             </p:pic>
           </mc:Fallback>
         </mc:AlternateContent>
-        <mc:AlternateContent xmlns:mc="http://schemas.openxmlformats.org/markup-compatibility/2006">
-          <mc:Choice xmlns:p14="http://schemas.microsoft.com/office/powerpoint/2010/main" Requires="p14">
+        <mc:AlternateContent xmlns:mc="http://schemas.openxmlformats.org/markup-compatibility/2006" xmlns:p14="http://schemas.microsoft.com/office/powerpoint/2010/main">
+          <mc:Choice Requires="p14">
             <p:contentPart p14:bwMode="auto" r:id="rId48">
               <p14:nvContentPartPr>
                 <p14:cNvPr id="38" name="Ink 37">
@@ -11058,7 +12057,7 @@
               </p14:xfrm>
             </p:contentPart>
           </mc:Choice>
-          <mc:Fallback>
+          <mc:Fallback xmlns="">
             <p:pic>
               <p:nvPicPr>
                 <p:cNvPr id="38" name="Ink 37">
@@ -11089,8 +12088,8 @@
             </p:pic>
           </mc:Fallback>
         </mc:AlternateContent>
-        <mc:AlternateContent xmlns:mc="http://schemas.openxmlformats.org/markup-compatibility/2006">
-          <mc:Choice xmlns:p14="http://schemas.microsoft.com/office/powerpoint/2010/main" Requires="p14">
+        <mc:AlternateContent xmlns:mc="http://schemas.openxmlformats.org/markup-compatibility/2006" xmlns:p14="http://schemas.microsoft.com/office/powerpoint/2010/main">
+          <mc:Choice Requires="p14">
             <p:contentPart p14:bwMode="auto" r:id="rId50">
               <p14:nvContentPartPr>
                 <p14:cNvPr id="39" name="Ink 38">
@@ -11109,7 +12108,7 @@
               </p14:xfrm>
             </p:contentPart>
           </mc:Choice>
-          <mc:Fallback>
+          <mc:Fallback xmlns="">
             <p:pic>
               <p:nvPicPr>
                 <p:cNvPr id="39" name="Ink 38">
@@ -11161,8 +12160,8 @@
             <a:chExt cx="531000" cy="679680"/>
           </a:xfrm>
         </p:grpSpPr>
-        <mc:AlternateContent xmlns:mc="http://schemas.openxmlformats.org/markup-compatibility/2006">
-          <mc:Choice xmlns:p14="http://schemas.microsoft.com/office/powerpoint/2010/main" Requires="p14">
+        <mc:AlternateContent xmlns:mc="http://schemas.openxmlformats.org/markup-compatibility/2006" xmlns:p14="http://schemas.microsoft.com/office/powerpoint/2010/main">
+          <mc:Choice Requires="p14">
             <p:contentPart p14:bwMode="auto" r:id="rId52">
               <p14:nvContentPartPr>
                 <p14:cNvPr id="42" name="Ink 41">
@@ -11181,7 +12180,7 @@
               </p14:xfrm>
             </p:contentPart>
           </mc:Choice>
-          <mc:Fallback>
+          <mc:Fallback xmlns="">
             <p:pic>
               <p:nvPicPr>
                 <p:cNvPr id="42" name="Ink 41">
@@ -11212,8 +12211,8 @@
             </p:pic>
           </mc:Fallback>
         </mc:AlternateContent>
-        <mc:AlternateContent xmlns:mc="http://schemas.openxmlformats.org/markup-compatibility/2006">
-          <mc:Choice xmlns:p14="http://schemas.microsoft.com/office/powerpoint/2010/main" Requires="p14">
+        <mc:AlternateContent xmlns:mc="http://schemas.openxmlformats.org/markup-compatibility/2006" xmlns:p14="http://schemas.microsoft.com/office/powerpoint/2010/main">
+          <mc:Choice Requires="p14">
             <p:contentPart p14:bwMode="auto" r:id="rId54">
               <p14:nvContentPartPr>
                 <p14:cNvPr id="43" name="Ink 42">
@@ -11232,7 +12231,7 @@
               </p14:xfrm>
             </p:contentPart>
           </mc:Choice>
-          <mc:Fallback>
+          <mc:Fallback xmlns="">
             <p:pic>
               <p:nvPicPr>
                 <p:cNvPr id="43" name="Ink 42">
@@ -11263,8 +12262,8 @@
             </p:pic>
           </mc:Fallback>
         </mc:AlternateContent>
-        <mc:AlternateContent xmlns:mc="http://schemas.openxmlformats.org/markup-compatibility/2006">
-          <mc:Choice xmlns:p14="http://schemas.microsoft.com/office/powerpoint/2010/main" Requires="p14">
+        <mc:AlternateContent xmlns:mc="http://schemas.openxmlformats.org/markup-compatibility/2006" xmlns:p14="http://schemas.microsoft.com/office/powerpoint/2010/main">
+          <mc:Choice Requires="p14">
             <p:contentPart p14:bwMode="auto" r:id="rId56">
               <p14:nvContentPartPr>
                 <p14:cNvPr id="46" name="Ink 45">
@@ -11283,7 +12282,7 @@
               </p14:xfrm>
             </p:contentPart>
           </mc:Choice>
-          <mc:Fallback>
+          <mc:Fallback xmlns="">
             <p:pic>
               <p:nvPicPr>
                 <p:cNvPr id="46" name="Ink 45">
@@ -11335,8 +12334,8 @@
             <a:chExt cx="1656720" cy="1146240"/>
           </a:xfrm>
         </p:grpSpPr>
-        <mc:AlternateContent xmlns:mc="http://schemas.openxmlformats.org/markup-compatibility/2006">
-          <mc:Choice xmlns:p14="http://schemas.microsoft.com/office/powerpoint/2010/main" Requires="p14">
+        <mc:AlternateContent xmlns:mc="http://schemas.openxmlformats.org/markup-compatibility/2006" xmlns:p14="http://schemas.microsoft.com/office/powerpoint/2010/main">
+          <mc:Choice Requires="p14">
             <p:contentPart p14:bwMode="auto" r:id="rId58">
               <p14:nvContentPartPr>
                 <p14:cNvPr id="49" name="Ink 48">
@@ -11355,7 +12354,7 @@
               </p14:xfrm>
             </p:contentPart>
           </mc:Choice>
-          <mc:Fallback>
+          <mc:Fallback xmlns="">
             <p:pic>
               <p:nvPicPr>
                 <p:cNvPr id="49" name="Ink 48">
@@ -11386,8 +12385,8 @@
             </p:pic>
           </mc:Fallback>
         </mc:AlternateContent>
-        <mc:AlternateContent xmlns:mc="http://schemas.openxmlformats.org/markup-compatibility/2006">
-          <mc:Choice xmlns:p14="http://schemas.microsoft.com/office/powerpoint/2010/main" Requires="p14">
+        <mc:AlternateContent xmlns:mc="http://schemas.openxmlformats.org/markup-compatibility/2006" xmlns:p14="http://schemas.microsoft.com/office/powerpoint/2010/main">
+          <mc:Choice Requires="p14">
             <p:contentPart p14:bwMode="auto" r:id="rId60">
               <p14:nvContentPartPr>
                 <p14:cNvPr id="50" name="Ink 49">
@@ -11406,7 +12405,7 @@
               </p14:xfrm>
             </p:contentPart>
           </mc:Choice>
-          <mc:Fallback>
+          <mc:Fallback xmlns="">
             <p:pic>
               <p:nvPicPr>
                 <p:cNvPr id="50" name="Ink 49">
@@ -11437,8 +12436,8 @@
             </p:pic>
           </mc:Fallback>
         </mc:AlternateContent>
-        <mc:AlternateContent xmlns:mc="http://schemas.openxmlformats.org/markup-compatibility/2006">
-          <mc:Choice xmlns:p14="http://schemas.microsoft.com/office/powerpoint/2010/main" Requires="p14">
+        <mc:AlternateContent xmlns:mc="http://schemas.openxmlformats.org/markup-compatibility/2006" xmlns:p14="http://schemas.microsoft.com/office/powerpoint/2010/main">
+          <mc:Choice Requires="p14">
             <p:contentPart p14:bwMode="auto" r:id="rId62">
               <p14:nvContentPartPr>
                 <p14:cNvPr id="53" name="Ink 52">
@@ -11457,7 +12456,7 @@
               </p14:xfrm>
             </p:contentPart>
           </mc:Choice>
-          <mc:Fallback>
+          <mc:Fallback xmlns="">
             <p:pic>
               <p:nvPicPr>
                 <p:cNvPr id="53" name="Ink 52">
@@ -11489,8 +12488,8 @@
           </mc:Fallback>
         </mc:AlternateContent>
       </p:grpSp>
-      <mc:AlternateContent xmlns:mc="http://schemas.openxmlformats.org/markup-compatibility/2006">
-        <mc:Choice xmlns:p14="http://schemas.microsoft.com/office/powerpoint/2010/main" Requires="p14">
+      <mc:AlternateContent xmlns:mc="http://schemas.openxmlformats.org/markup-compatibility/2006" xmlns:p14="http://schemas.microsoft.com/office/powerpoint/2010/main">
+        <mc:Choice Requires="p14">
           <p:contentPart p14:bwMode="auto" r:id="rId64">
             <p14:nvContentPartPr>
               <p14:cNvPr id="63" name="Ink 62">
@@ -11509,7 +12508,7 @@
             </p14:xfrm>
           </p:contentPart>
         </mc:Choice>
-        <mc:Fallback>
+        <mc:Fallback xmlns="">
           <p:pic>
             <p:nvPicPr>
               <p:cNvPr id="63" name="Ink 62">
@@ -11560,8 +12559,8 @@
             <a:chExt cx="667440" cy="1066320"/>
           </a:xfrm>
         </p:grpSpPr>
-        <mc:AlternateContent xmlns:mc="http://schemas.openxmlformats.org/markup-compatibility/2006">
-          <mc:Choice xmlns:p14="http://schemas.microsoft.com/office/powerpoint/2010/main" Requires="p14">
+        <mc:AlternateContent xmlns:mc="http://schemas.openxmlformats.org/markup-compatibility/2006" xmlns:p14="http://schemas.microsoft.com/office/powerpoint/2010/main">
+          <mc:Choice Requires="p14">
             <p:contentPart p14:bwMode="auto" r:id="rId66">
               <p14:nvContentPartPr>
                 <p14:cNvPr id="64" name="Ink 63">
@@ -11580,7 +12579,7 @@
               </p14:xfrm>
             </p:contentPart>
           </mc:Choice>
-          <mc:Fallback>
+          <mc:Fallback xmlns="">
             <p:pic>
               <p:nvPicPr>
                 <p:cNvPr id="64" name="Ink 63">
@@ -11611,8 +12610,8 @@
             </p:pic>
           </mc:Fallback>
         </mc:AlternateContent>
-        <mc:AlternateContent xmlns:mc="http://schemas.openxmlformats.org/markup-compatibility/2006">
-          <mc:Choice xmlns:p14="http://schemas.microsoft.com/office/powerpoint/2010/main" Requires="p14">
+        <mc:AlternateContent xmlns:mc="http://schemas.openxmlformats.org/markup-compatibility/2006" xmlns:p14="http://schemas.microsoft.com/office/powerpoint/2010/main">
+          <mc:Choice Requires="p14">
             <p:contentPart p14:bwMode="auto" r:id="rId68">
               <p14:nvContentPartPr>
                 <p14:cNvPr id="65" name="Ink 64">
@@ -11631,7 +12630,7 @@
               </p14:xfrm>
             </p:contentPart>
           </mc:Choice>
-          <mc:Fallback>
+          <mc:Fallback xmlns="">
             <p:pic>
               <p:nvPicPr>
                 <p:cNvPr id="65" name="Ink 64">
@@ -11683,8 +12682,8 @@
             <a:chExt cx="2095200" cy="1667880"/>
           </a:xfrm>
         </p:grpSpPr>
-        <mc:AlternateContent xmlns:mc="http://schemas.openxmlformats.org/markup-compatibility/2006">
-          <mc:Choice xmlns:p14="http://schemas.microsoft.com/office/powerpoint/2010/main" Requires="p14">
+        <mc:AlternateContent xmlns:mc="http://schemas.openxmlformats.org/markup-compatibility/2006" xmlns:p14="http://schemas.microsoft.com/office/powerpoint/2010/main">
+          <mc:Choice Requires="p14">
             <p:contentPart p14:bwMode="auto" r:id="rId70">
               <p14:nvContentPartPr>
                 <p14:cNvPr id="68" name="Ink 67">
@@ -11703,7 +12702,7 @@
               </p14:xfrm>
             </p:contentPart>
           </mc:Choice>
-          <mc:Fallback>
+          <mc:Fallback xmlns="">
             <p:pic>
               <p:nvPicPr>
                 <p:cNvPr id="68" name="Ink 67">
@@ -11734,8 +12733,8 @@
             </p:pic>
           </mc:Fallback>
         </mc:AlternateContent>
-        <mc:AlternateContent xmlns:mc="http://schemas.openxmlformats.org/markup-compatibility/2006">
-          <mc:Choice xmlns:p14="http://schemas.microsoft.com/office/powerpoint/2010/main" Requires="p14">
+        <mc:AlternateContent xmlns:mc="http://schemas.openxmlformats.org/markup-compatibility/2006" xmlns:p14="http://schemas.microsoft.com/office/powerpoint/2010/main">
+          <mc:Choice Requires="p14">
             <p:contentPart p14:bwMode="auto" r:id="rId72">
               <p14:nvContentPartPr>
                 <p14:cNvPr id="69" name="Ink 68">
@@ -11754,7 +12753,7 @@
               </p14:xfrm>
             </p:contentPart>
           </mc:Choice>
-          <mc:Fallback>
+          <mc:Fallback xmlns="">
             <p:pic>
               <p:nvPicPr>
                 <p:cNvPr id="69" name="Ink 68">
@@ -11785,8 +12784,8 @@
             </p:pic>
           </mc:Fallback>
         </mc:AlternateContent>
-        <mc:AlternateContent xmlns:mc="http://schemas.openxmlformats.org/markup-compatibility/2006">
-          <mc:Choice xmlns:p14="http://schemas.microsoft.com/office/powerpoint/2010/main" Requires="p14">
+        <mc:AlternateContent xmlns:mc="http://schemas.openxmlformats.org/markup-compatibility/2006" xmlns:p14="http://schemas.microsoft.com/office/powerpoint/2010/main">
+          <mc:Choice Requires="p14">
             <p:contentPart p14:bwMode="auto" r:id="rId74">
               <p14:nvContentPartPr>
                 <p14:cNvPr id="70" name="Ink 69">
@@ -11805,7 +12804,7 @@
               </p14:xfrm>
             </p:contentPart>
           </mc:Choice>
-          <mc:Fallback>
+          <mc:Fallback xmlns="">
             <p:pic>
               <p:nvPicPr>
                 <p:cNvPr id="70" name="Ink 69">
@@ -11836,8 +12835,8 @@
             </p:pic>
           </mc:Fallback>
         </mc:AlternateContent>
-        <mc:AlternateContent xmlns:mc="http://schemas.openxmlformats.org/markup-compatibility/2006">
-          <mc:Choice xmlns:p14="http://schemas.microsoft.com/office/powerpoint/2010/main" Requires="p14">
+        <mc:AlternateContent xmlns:mc="http://schemas.openxmlformats.org/markup-compatibility/2006" xmlns:p14="http://schemas.microsoft.com/office/powerpoint/2010/main">
+          <mc:Choice Requires="p14">
             <p:contentPart p14:bwMode="auto" r:id="rId76">
               <p14:nvContentPartPr>
                 <p14:cNvPr id="71" name="Ink 70">
@@ -11856,7 +12855,7 @@
               </p14:xfrm>
             </p:contentPart>
           </mc:Choice>
-          <mc:Fallback>
+          <mc:Fallback xmlns="">
             <p:pic>
               <p:nvPicPr>
                 <p:cNvPr id="71" name="Ink 70">
@@ -11887,8 +12886,8 @@
             </p:pic>
           </mc:Fallback>
         </mc:AlternateContent>
-        <mc:AlternateContent xmlns:mc="http://schemas.openxmlformats.org/markup-compatibility/2006">
-          <mc:Choice xmlns:p14="http://schemas.microsoft.com/office/powerpoint/2010/main" Requires="p14">
+        <mc:AlternateContent xmlns:mc="http://schemas.openxmlformats.org/markup-compatibility/2006" xmlns:p14="http://schemas.microsoft.com/office/powerpoint/2010/main">
+          <mc:Choice Requires="p14">
             <p:contentPart p14:bwMode="auto" r:id="rId78">
               <p14:nvContentPartPr>
                 <p14:cNvPr id="72" name="Ink 71">
@@ -11907,7 +12906,7 @@
               </p14:xfrm>
             </p:contentPart>
           </mc:Choice>
-          <mc:Fallback>
+          <mc:Fallback xmlns="">
             <p:pic>
               <p:nvPicPr>
                 <p:cNvPr id="72" name="Ink 71">
@@ -11938,8 +12937,8 @@
             </p:pic>
           </mc:Fallback>
         </mc:AlternateContent>
-        <mc:AlternateContent xmlns:mc="http://schemas.openxmlformats.org/markup-compatibility/2006">
-          <mc:Choice xmlns:p14="http://schemas.microsoft.com/office/powerpoint/2010/main" Requires="p14">
+        <mc:AlternateContent xmlns:mc="http://schemas.openxmlformats.org/markup-compatibility/2006" xmlns:p14="http://schemas.microsoft.com/office/powerpoint/2010/main">
+          <mc:Choice Requires="p14">
             <p:contentPart p14:bwMode="auto" r:id="rId80">
               <p14:nvContentPartPr>
                 <p14:cNvPr id="73" name="Ink 72">
@@ -11958,7 +12957,7 @@
               </p14:xfrm>
             </p:contentPart>
           </mc:Choice>
-          <mc:Fallback>
+          <mc:Fallback xmlns="">
             <p:pic>
               <p:nvPicPr>
                 <p:cNvPr id="73" name="Ink 72">
@@ -11989,8 +12988,8 @@
             </p:pic>
           </mc:Fallback>
         </mc:AlternateContent>
-        <mc:AlternateContent xmlns:mc="http://schemas.openxmlformats.org/markup-compatibility/2006">
-          <mc:Choice xmlns:p14="http://schemas.microsoft.com/office/powerpoint/2010/main" Requires="p14">
+        <mc:AlternateContent xmlns:mc="http://schemas.openxmlformats.org/markup-compatibility/2006" xmlns:p14="http://schemas.microsoft.com/office/powerpoint/2010/main">
+          <mc:Choice Requires="p14">
             <p:contentPart p14:bwMode="auto" r:id="rId82">
               <p14:nvContentPartPr>
                 <p14:cNvPr id="74" name="Ink 73">
@@ -12009,7 +13008,7 @@
               </p14:xfrm>
             </p:contentPart>
           </mc:Choice>
-          <mc:Fallback>
+          <mc:Fallback xmlns="">
             <p:pic>
               <p:nvPicPr>
                 <p:cNvPr id="74" name="Ink 73">
@@ -12040,8 +13039,8 @@
             </p:pic>
           </mc:Fallback>
         </mc:AlternateContent>
-        <mc:AlternateContent xmlns:mc="http://schemas.openxmlformats.org/markup-compatibility/2006">
-          <mc:Choice xmlns:p14="http://schemas.microsoft.com/office/powerpoint/2010/main" Requires="p14">
+        <mc:AlternateContent xmlns:mc="http://schemas.openxmlformats.org/markup-compatibility/2006" xmlns:p14="http://schemas.microsoft.com/office/powerpoint/2010/main">
+          <mc:Choice Requires="p14">
             <p:contentPart p14:bwMode="auto" r:id="rId84">
               <p14:nvContentPartPr>
                 <p14:cNvPr id="75" name="Ink 74">
@@ -12060,7 +13059,7 @@
               </p14:xfrm>
             </p:contentPart>
           </mc:Choice>
-          <mc:Fallback>
+          <mc:Fallback xmlns="">
             <p:pic>
               <p:nvPicPr>
                 <p:cNvPr id="75" name="Ink 74">
@@ -12091,8 +13090,8 @@
             </p:pic>
           </mc:Fallback>
         </mc:AlternateContent>
-        <mc:AlternateContent xmlns:mc="http://schemas.openxmlformats.org/markup-compatibility/2006">
-          <mc:Choice xmlns:p14="http://schemas.microsoft.com/office/powerpoint/2010/main" Requires="p14">
+        <mc:AlternateContent xmlns:mc="http://schemas.openxmlformats.org/markup-compatibility/2006" xmlns:p14="http://schemas.microsoft.com/office/powerpoint/2010/main">
+          <mc:Choice Requires="p14">
             <p:contentPart p14:bwMode="auto" r:id="rId86">
               <p14:nvContentPartPr>
                 <p14:cNvPr id="76" name="Ink 75">
@@ -12111,7 +13110,7 @@
               </p14:xfrm>
             </p:contentPart>
           </mc:Choice>
-          <mc:Fallback>
+          <mc:Fallback xmlns="">
             <p:pic>
               <p:nvPicPr>
                 <p:cNvPr id="76" name="Ink 75">
@@ -12142,8 +13141,8 @@
             </p:pic>
           </mc:Fallback>
         </mc:AlternateContent>
-        <mc:AlternateContent xmlns:mc="http://schemas.openxmlformats.org/markup-compatibility/2006">
-          <mc:Choice xmlns:p14="http://schemas.microsoft.com/office/powerpoint/2010/main" Requires="p14">
+        <mc:AlternateContent xmlns:mc="http://schemas.openxmlformats.org/markup-compatibility/2006" xmlns:p14="http://schemas.microsoft.com/office/powerpoint/2010/main">
+          <mc:Choice Requires="p14">
             <p:contentPart p14:bwMode="auto" r:id="rId88">
               <p14:nvContentPartPr>
                 <p14:cNvPr id="77" name="Ink 76">
@@ -12162,7 +13161,7 @@
               </p14:xfrm>
             </p:contentPart>
           </mc:Choice>
-          <mc:Fallback>
+          <mc:Fallback xmlns="">
             <p:pic>
               <p:nvPicPr>
                 <p:cNvPr id="77" name="Ink 76">
@@ -12207,7 +13206,7 @@
 </p:sld>
 </file>
 
-<file path=ppt/slides/slide5.xml><?xml version="1.0" encoding="utf-8"?>
+<file path=ppt/slides/slide6.xml><?xml version="1.0" encoding="utf-8"?>
 <p:sld xmlns:a="http://schemas.openxmlformats.org/drawingml/2006/main" xmlns:r="http://schemas.openxmlformats.org/officeDocument/2006/relationships" xmlns:p="http://schemas.openxmlformats.org/presentationml/2006/main">
   <p:cSld>
     <p:spTree>
@@ -12270,12 +13269,14 @@
         </p:nvSpPr>
         <p:spPr>
           <a:xfrm>
-            <a:off x="1451579" y="1853754"/>
-            <a:ext cx="9603275" cy="4199727"/>
+            <a:off x="1137147" y="1853754"/>
+            <a:ext cx="10279536" cy="4199727"/>
           </a:xfrm>
         </p:spPr>
         <p:txBody>
-          <a:bodyPr/>
+          <a:bodyPr>
+            <a:normAutofit lnSpcReduction="10000"/>
+          </a:bodyPr>
           <a:lstStyle/>
           <a:p>
             <a:r>
@@ -12291,22 +13292,29 @@
             </a:r>
           </a:p>
           <a:p>
-            <a:r>
-              <a:rPr lang="en-US" dirty="0"/>
-              <a:t>If there’s no X, we have variance that is still unexplained. </a:t>
-            </a:r>
-          </a:p>
-          <a:p>
             <a:pPr lvl="1"/>
             <a:r>
-              <a:rPr lang="en-US" dirty="0"/>
-              <a:t>The amount that each Y varies from said mean. </a:t>
-            </a:r>
-          </a:p>
-          <a:p>
-            <a:r>
-              <a:rPr lang="en-US" dirty="0"/>
-              <a:t>A model without X still makes predictions, those predictions are the mean for all Y (no X to change the prediction), and the distance from y to prediction is the variance. </a:t>
+              <a:rPr lang="en-US" b="1" dirty="0"/>
+              <a:t>This is also the baseline, the worst possible predictive model that we can make. </a:t>
+            </a:r>
+          </a:p>
+          <a:p>
+            <a:r>
+              <a:rPr lang="en-US" dirty="0"/>
+              <a:t>If there’s no X, we have variance that is unexplained. </a:t>
+            </a:r>
+          </a:p>
+          <a:p>
+            <a:pPr lvl="1"/>
+            <a:r>
+              <a:rPr lang="en-US" dirty="0"/>
+              <a:t>The amount that each Y varies from said mean. The ss-total aka the variance. </a:t>
+            </a:r>
+          </a:p>
+          <a:p>
+            <a:r>
+              <a:rPr lang="en-US" dirty="0"/>
+              <a:t>A model without X still makes predictions, those predictions are the mean for all Y (no X to change the prediction), and the distance from y to prediction is the unexplained variance. </a:t>
             </a:r>
           </a:p>
           <a:p>
@@ -12344,7 +13352,150 @@
 </p:sld>
 </file>
 
-<file path=ppt/slides/slide6.xml><?xml version="1.0" encoding="utf-8"?>
+<file path=ppt/slides/slide7.xml><?xml version="1.0" encoding="utf-8"?>
+<p:sld xmlns:a="http://schemas.openxmlformats.org/drawingml/2006/main" xmlns:r="http://schemas.openxmlformats.org/officeDocument/2006/relationships" xmlns:p="http://schemas.openxmlformats.org/presentationml/2006/main">
+  <p:cSld>
+    <p:spTree>
+      <p:nvGrpSpPr>
+        <p:cNvPr id="1" name=""/>
+        <p:cNvGrpSpPr/>
+        <p:nvPr/>
+      </p:nvGrpSpPr>
+      <p:grpSpPr>
+        <a:xfrm>
+          <a:off x="0" y="0"/>
+          <a:ext cx="0" cy="0"/>
+          <a:chOff x="0" y="0"/>
+          <a:chExt cx="0" cy="0"/>
+        </a:xfrm>
+      </p:grpSpPr>
+      <p:sp>
+        <p:nvSpPr>
+          <p:cNvPr id="2" name="Title 1">
+            <a:extLst>
+              <a:ext uri="{FF2B5EF4-FFF2-40B4-BE49-F238E27FC236}">
+                <a16:creationId xmlns:a16="http://schemas.microsoft.com/office/drawing/2014/main" id="{29A648B8-D523-B96B-A22D-A6B3B2F97CAC}"/>
+              </a:ext>
+            </a:extLst>
+          </p:cNvPr>
+          <p:cNvSpPr>
+            <a:spLocks noGrp="1"/>
+          </p:cNvSpPr>
+          <p:nvPr>
+            <p:ph type="title"/>
+          </p:nvPr>
+        </p:nvSpPr>
+        <p:spPr/>
+        <p:txBody>
+          <a:bodyPr/>
+          <a:lstStyle/>
+          <a:p>
+            <a:r>
+              <a:rPr lang="en-US" dirty="0"/>
+              <a:t>Linear Regression Formulas</a:t>
+            </a:r>
+          </a:p>
+        </p:txBody>
+      </p:sp>
+      <p:sp>
+        <p:nvSpPr>
+          <p:cNvPr id="3" name="Content Placeholder 2">
+            <a:extLst>
+              <a:ext uri="{FF2B5EF4-FFF2-40B4-BE49-F238E27FC236}">
+                <a16:creationId xmlns:a16="http://schemas.microsoft.com/office/drawing/2014/main" id="{D260CACB-0BE9-96B9-5855-65A08EC7A1AE}"/>
+              </a:ext>
+            </a:extLst>
+          </p:cNvPr>
+          <p:cNvSpPr>
+            <a:spLocks noGrp="1"/>
+          </p:cNvSpPr>
+          <p:nvPr>
+            <p:ph idx="1"/>
+          </p:nvPr>
+        </p:nvSpPr>
+        <p:spPr>
+          <a:xfrm>
+            <a:off x="1451579" y="1853754"/>
+            <a:ext cx="9603275" cy="4199727"/>
+          </a:xfrm>
+        </p:spPr>
+        <p:txBody>
+          <a:bodyPr/>
+          <a:lstStyle/>
+          <a:p>
+            <a:r>
+              <a:rPr lang="en-US" dirty="0"/>
+              <a:t>Y = m*x + b</a:t>
+            </a:r>
+          </a:p>
+          <a:p>
+            <a:pPr lvl="1"/>
+            <a:r>
+              <a:rPr lang="en-US" dirty="0"/>
+              <a:t>One X value. </a:t>
+            </a:r>
+          </a:p>
+          <a:p>
+            <a:pPr lvl="1"/>
+            <a:r>
+              <a:rPr lang="en-US" dirty="0"/>
+              <a:t>Prediction changes with different inputs of X. </a:t>
+            </a:r>
+          </a:p>
+          <a:p>
+            <a:r>
+              <a:rPr lang="en-US" dirty="0"/>
+              <a:t>Y = m*0 + b</a:t>
+            </a:r>
+          </a:p>
+          <a:p>
+            <a:r>
+              <a:rPr lang="en-US" dirty="0"/>
+              <a:t>    = b</a:t>
+            </a:r>
+          </a:p>
+          <a:p>
+            <a:pPr lvl="1"/>
+            <a:r>
+              <a:rPr lang="en-US" dirty="0"/>
+              <a:t>No X values, only Y. </a:t>
+            </a:r>
+          </a:p>
+          <a:p>
+            <a:pPr lvl="1"/>
+            <a:r>
+              <a:rPr lang="en-US" dirty="0"/>
+              <a:t>Constant, flat line prediction – prediction can’t change because there’s no variable. </a:t>
+            </a:r>
+          </a:p>
+          <a:p>
+            <a:pPr lvl="1"/>
+            <a:r>
+              <a:rPr lang="en-US" dirty="0"/>
+              <a:t>Y = b is </a:t>
+            </a:r>
+            <a:r>
+              <a:rPr lang="en-US"/>
+              <a:t>a flat line at b. </a:t>
+            </a:r>
+            <a:endParaRPr lang="en-US" dirty="0"/>
+          </a:p>
+        </p:txBody>
+      </p:sp>
+    </p:spTree>
+    <p:extLst>
+      <p:ext uri="{BB962C8B-B14F-4D97-AF65-F5344CB8AC3E}">
+        <p14:creationId xmlns:p14="http://schemas.microsoft.com/office/powerpoint/2010/main" val="3726935521"/>
+      </p:ext>
+    </p:extLst>
+  </p:cSld>
+  <p:clrMapOvr>
+    <a:masterClrMapping/>
+  </p:clrMapOvr>
+</p:sld>
+</file>
+
+<file path=ppt/slides/slide8.xml><?xml version="1.0" encoding="utf-8"?>
 <p:sld xmlns:a="http://schemas.openxmlformats.org/drawingml/2006/main" xmlns:r="http://schemas.openxmlformats.org/officeDocument/2006/relationships" xmlns:p="http://schemas.openxmlformats.org/presentationml/2006/main">
   <p:cSld>
     <p:spTree>
@@ -12409,8 +13560,8 @@
             <a:chExt cx="5501160" cy="2985840"/>
           </a:xfrm>
         </p:grpSpPr>
-        <mc:AlternateContent xmlns:mc="http://schemas.openxmlformats.org/markup-compatibility/2006">
-          <mc:Choice xmlns:p14="http://schemas.microsoft.com/office/powerpoint/2010/main" Requires="p14">
+        <mc:AlternateContent xmlns:mc="http://schemas.openxmlformats.org/markup-compatibility/2006" xmlns:p14="http://schemas.microsoft.com/office/powerpoint/2010/main">
+          <mc:Choice Requires="p14">
             <p:contentPart p14:bwMode="auto" r:id="rId2">
               <p14:nvContentPartPr>
                 <p14:cNvPr id="16" name="Ink 15">
@@ -12429,7 +13580,7 @@
               </p14:xfrm>
             </p:contentPart>
           </mc:Choice>
-          <mc:Fallback>
+          <mc:Fallback xmlns="">
             <p:pic>
               <p:nvPicPr>
                 <p:cNvPr id="16" name="Ink 15">
@@ -12460,8 +13611,8 @@
             </p:pic>
           </mc:Fallback>
         </mc:AlternateContent>
-        <mc:AlternateContent xmlns:mc="http://schemas.openxmlformats.org/markup-compatibility/2006">
-          <mc:Choice xmlns:p14="http://schemas.microsoft.com/office/powerpoint/2010/main" Requires="p14">
+        <mc:AlternateContent xmlns:mc="http://schemas.openxmlformats.org/markup-compatibility/2006" xmlns:p14="http://schemas.microsoft.com/office/powerpoint/2010/main">
+          <mc:Choice Requires="p14">
             <p:contentPart p14:bwMode="auto" r:id="rId4">
               <p14:nvContentPartPr>
                 <p14:cNvPr id="17" name="Ink 16">
@@ -12480,7 +13631,7 @@
               </p14:xfrm>
             </p:contentPart>
           </mc:Choice>
-          <mc:Fallback>
+          <mc:Fallback xmlns="">
             <p:pic>
               <p:nvPicPr>
                 <p:cNvPr id="17" name="Ink 16">
@@ -12512,8 +13663,8 @@
           </mc:Fallback>
         </mc:AlternateContent>
       </p:grpSp>
-      <mc:AlternateContent xmlns:mc="http://schemas.openxmlformats.org/markup-compatibility/2006">
-        <mc:Choice xmlns:p14="http://schemas.microsoft.com/office/powerpoint/2010/main" Requires="p14">
+      <mc:AlternateContent xmlns:mc="http://schemas.openxmlformats.org/markup-compatibility/2006" xmlns:p14="http://schemas.microsoft.com/office/powerpoint/2010/main">
+        <mc:Choice Requires="p14">
           <p:contentPart p14:bwMode="auto" r:id="rId6">
             <p14:nvContentPartPr>
               <p14:cNvPr id="18" name="Ink 17">
@@ -12532,7 +13683,7 @@
             </p14:xfrm>
           </p:contentPart>
         </mc:Choice>
-        <mc:Fallback>
+        <mc:Fallback xmlns="">
           <p:pic>
             <p:nvPicPr>
               <p:cNvPr id="18" name="Ink 17">
@@ -12563,8 +13714,8 @@
           </p:pic>
         </mc:Fallback>
       </mc:AlternateContent>
-      <mc:AlternateContent xmlns:mc="http://schemas.openxmlformats.org/markup-compatibility/2006">
-        <mc:Choice xmlns:p14="http://schemas.microsoft.com/office/powerpoint/2010/main" Requires="p14">
+      <mc:AlternateContent xmlns:mc="http://schemas.openxmlformats.org/markup-compatibility/2006" xmlns:p14="http://schemas.microsoft.com/office/powerpoint/2010/main">
+        <mc:Choice Requires="p14">
           <p:contentPart p14:bwMode="auto" r:id="rId8">
             <p14:nvContentPartPr>
               <p14:cNvPr id="19" name="Ink 18">
@@ -12583,7 +13734,7 @@
             </p14:xfrm>
           </p:contentPart>
         </mc:Choice>
-        <mc:Fallback>
+        <mc:Fallback xmlns="">
           <p:pic>
             <p:nvPicPr>
               <p:cNvPr id="19" name="Ink 18">
@@ -12614,8 +13765,8 @@
           </p:pic>
         </mc:Fallback>
       </mc:AlternateContent>
-      <mc:AlternateContent xmlns:mc="http://schemas.openxmlformats.org/markup-compatibility/2006">
-        <mc:Choice xmlns:p14="http://schemas.microsoft.com/office/powerpoint/2010/main" Requires="p14">
+      <mc:AlternateContent xmlns:mc="http://schemas.openxmlformats.org/markup-compatibility/2006" xmlns:p14="http://schemas.microsoft.com/office/powerpoint/2010/main">
+        <mc:Choice Requires="p14">
           <p:contentPart p14:bwMode="auto" r:id="rId10">
             <p14:nvContentPartPr>
               <p14:cNvPr id="20" name="Ink 19">
@@ -12634,7 +13785,7 @@
             </p14:xfrm>
           </p:contentPart>
         </mc:Choice>
-        <mc:Fallback>
+        <mc:Fallback xmlns="">
           <p:pic>
             <p:nvPicPr>
               <p:cNvPr id="20" name="Ink 19">
@@ -12665,8 +13816,8 @@
           </p:pic>
         </mc:Fallback>
       </mc:AlternateContent>
-      <mc:AlternateContent xmlns:mc="http://schemas.openxmlformats.org/markup-compatibility/2006">
-        <mc:Choice xmlns:p14="http://schemas.microsoft.com/office/powerpoint/2010/main" Requires="p14">
+      <mc:AlternateContent xmlns:mc="http://schemas.openxmlformats.org/markup-compatibility/2006" xmlns:p14="http://schemas.microsoft.com/office/powerpoint/2010/main">
+        <mc:Choice Requires="p14">
           <p:contentPart p14:bwMode="auto" r:id="rId12">
             <p14:nvContentPartPr>
               <p14:cNvPr id="21" name="Ink 20">
@@ -12685,7 +13836,7 @@
             </p14:xfrm>
           </p:contentPart>
         </mc:Choice>
-        <mc:Fallback>
+        <mc:Fallback xmlns="">
           <p:pic>
             <p:nvPicPr>
               <p:cNvPr id="21" name="Ink 20">
@@ -12716,8 +13867,8 @@
           </p:pic>
         </mc:Fallback>
       </mc:AlternateContent>
-      <mc:AlternateContent xmlns:mc="http://schemas.openxmlformats.org/markup-compatibility/2006">
-        <mc:Choice xmlns:p14="http://schemas.microsoft.com/office/powerpoint/2010/main" Requires="p14">
+      <mc:AlternateContent xmlns:mc="http://schemas.openxmlformats.org/markup-compatibility/2006" xmlns:p14="http://schemas.microsoft.com/office/powerpoint/2010/main">
+        <mc:Choice Requires="p14">
           <p:contentPart p14:bwMode="auto" r:id="rId14">
             <p14:nvContentPartPr>
               <p14:cNvPr id="22" name="Ink 21">
@@ -12736,7 +13887,7 @@
             </p14:xfrm>
           </p:contentPart>
         </mc:Choice>
-        <mc:Fallback>
+        <mc:Fallback xmlns="">
           <p:pic>
             <p:nvPicPr>
               <p:cNvPr id="22" name="Ink 21">
@@ -12767,8 +13918,8 @@
           </p:pic>
         </mc:Fallback>
       </mc:AlternateContent>
-      <mc:AlternateContent xmlns:mc="http://schemas.openxmlformats.org/markup-compatibility/2006">
-        <mc:Choice xmlns:p14="http://schemas.microsoft.com/office/powerpoint/2010/main" Requires="p14">
+      <mc:AlternateContent xmlns:mc="http://schemas.openxmlformats.org/markup-compatibility/2006" xmlns:p14="http://schemas.microsoft.com/office/powerpoint/2010/main">
+        <mc:Choice Requires="p14">
           <p:contentPart p14:bwMode="auto" r:id="rId16">
             <p14:nvContentPartPr>
               <p14:cNvPr id="23" name="Ink 22">
@@ -12787,7 +13938,7 @@
             </p14:xfrm>
           </p:contentPart>
         </mc:Choice>
-        <mc:Fallback>
+        <mc:Fallback xmlns="">
           <p:pic>
             <p:nvPicPr>
               <p:cNvPr id="23" name="Ink 22">
@@ -12818,8 +13969,8 @@
           </p:pic>
         </mc:Fallback>
       </mc:AlternateContent>
-      <mc:AlternateContent xmlns:mc="http://schemas.openxmlformats.org/markup-compatibility/2006">
-        <mc:Choice xmlns:p14="http://schemas.microsoft.com/office/powerpoint/2010/main" Requires="p14">
+      <mc:AlternateContent xmlns:mc="http://schemas.openxmlformats.org/markup-compatibility/2006" xmlns:p14="http://schemas.microsoft.com/office/powerpoint/2010/main">
+        <mc:Choice Requires="p14">
           <p:contentPart p14:bwMode="auto" r:id="rId18">
             <p14:nvContentPartPr>
               <p14:cNvPr id="24" name="Ink 23">
@@ -12838,7 +13989,7 @@
             </p14:xfrm>
           </p:contentPart>
         </mc:Choice>
-        <mc:Fallback>
+        <mc:Fallback xmlns="">
           <p:pic>
             <p:nvPicPr>
               <p:cNvPr id="24" name="Ink 23">
@@ -12889,8 +14040,8 @@
             <a:chExt cx="2329560" cy="3774600"/>
           </a:xfrm>
         </p:grpSpPr>
-        <mc:AlternateContent xmlns:mc="http://schemas.openxmlformats.org/markup-compatibility/2006">
-          <mc:Choice xmlns:p14="http://schemas.microsoft.com/office/powerpoint/2010/main" Requires="p14">
+        <mc:AlternateContent xmlns:mc="http://schemas.openxmlformats.org/markup-compatibility/2006" xmlns:p14="http://schemas.microsoft.com/office/powerpoint/2010/main">
+          <mc:Choice Requires="p14">
             <p:contentPart p14:bwMode="auto" r:id="rId20">
               <p14:nvContentPartPr>
                 <p14:cNvPr id="26" name="Ink 25">
@@ -12909,7 +14060,7 @@
               </p14:xfrm>
             </p:contentPart>
           </mc:Choice>
-          <mc:Fallback>
+          <mc:Fallback xmlns="">
             <p:pic>
               <p:nvPicPr>
                 <p:cNvPr id="26" name="Ink 25">
@@ -12940,8 +14091,8 @@
             </p:pic>
           </mc:Fallback>
         </mc:AlternateContent>
-        <mc:AlternateContent xmlns:mc="http://schemas.openxmlformats.org/markup-compatibility/2006">
-          <mc:Choice xmlns:p14="http://schemas.microsoft.com/office/powerpoint/2010/main" Requires="p14">
+        <mc:AlternateContent xmlns:mc="http://schemas.openxmlformats.org/markup-compatibility/2006" xmlns:p14="http://schemas.microsoft.com/office/powerpoint/2010/main">
+          <mc:Choice Requires="p14">
             <p:contentPart p14:bwMode="auto" r:id="rId22">
               <p14:nvContentPartPr>
                 <p14:cNvPr id="27" name="Ink 26">
@@ -12960,7 +14111,7 @@
               </p14:xfrm>
             </p:contentPart>
           </mc:Choice>
-          <mc:Fallback>
+          <mc:Fallback xmlns="">
             <p:pic>
               <p:nvPicPr>
                 <p:cNvPr id="27" name="Ink 26">
@@ -12992,8 +14143,8 @@
           </mc:Fallback>
         </mc:AlternateContent>
       </p:grpSp>
-      <mc:AlternateContent xmlns:mc="http://schemas.openxmlformats.org/markup-compatibility/2006">
-        <mc:Choice xmlns:p14="http://schemas.microsoft.com/office/powerpoint/2010/main" Requires="p14">
+      <mc:AlternateContent xmlns:mc="http://schemas.openxmlformats.org/markup-compatibility/2006" xmlns:p14="http://schemas.microsoft.com/office/powerpoint/2010/main">
+        <mc:Choice Requires="p14">
           <p:contentPart p14:bwMode="auto" r:id="rId24">
             <p14:nvContentPartPr>
               <p14:cNvPr id="28" name="Ink 27">
@@ -13012,7 +14163,7 @@
             </p14:xfrm>
           </p:contentPart>
         </mc:Choice>
-        <mc:Fallback>
+        <mc:Fallback xmlns="">
           <p:pic>
             <p:nvPicPr>
               <p:cNvPr id="28" name="Ink 27">
@@ -13063,8 +14214,8 @@
             <a:chExt cx="2102040" cy="599040"/>
           </a:xfrm>
         </p:grpSpPr>
-        <mc:AlternateContent xmlns:mc="http://schemas.openxmlformats.org/markup-compatibility/2006">
-          <mc:Choice xmlns:p14="http://schemas.microsoft.com/office/powerpoint/2010/main" Requires="p14">
+        <mc:AlternateContent xmlns:mc="http://schemas.openxmlformats.org/markup-compatibility/2006" xmlns:p14="http://schemas.microsoft.com/office/powerpoint/2010/main">
+          <mc:Choice Requires="p14">
             <p:contentPart p14:bwMode="auto" r:id="rId26">
               <p14:nvContentPartPr>
                 <p14:cNvPr id="30" name="Ink 29">
@@ -13083,7 +14234,7 @@
               </p14:xfrm>
             </p:contentPart>
           </mc:Choice>
-          <mc:Fallback>
+          <mc:Fallback xmlns="">
             <p:pic>
               <p:nvPicPr>
                 <p:cNvPr id="30" name="Ink 29">
@@ -13114,8 +14265,8 @@
             </p:pic>
           </mc:Fallback>
         </mc:AlternateContent>
-        <mc:AlternateContent xmlns:mc="http://schemas.openxmlformats.org/markup-compatibility/2006">
-          <mc:Choice xmlns:p14="http://schemas.microsoft.com/office/powerpoint/2010/main" Requires="p14">
+        <mc:AlternateContent xmlns:mc="http://schemas.openxmlformats.org/markup-compatibility/2006" xmlns:p14="http://schemas.microsoft.com/office/powerpoint/2010/main">
+          <mc:Choice Requires="p14">
             <p:contentPart p14:bwMode="auto" r:id="rId28">
               <p14:nvContentPartPr>
                 <p14:cNvPr id="31" name="Ink 30">
@@ -13134,7 +14285,7 @@
               </p14:xfrm>
             </p:contentPart>
           </mc:Choice>
-          <mc:Fallback>
+          <mc:Fallback xmlns="">
             <p:pic>
               <p:nvPicPr>
                 <p:cNvPr id="31" name="Ink 30">
@@ -13165,8 +14316,8 @@
             </p:pic>
           </mc:Fallback>
         </mc:AlternateContent>
-        <mc:AlternateContent xmlns:mc="http://schemas.openxmlformats.org/markup-compatibility/2006">
-          <mc:Choice xmlns:p14="http://schemas.microsoft.com/office/powerpoint/2010/main" Requires="p14">
+        <mc:AlternateContent xmlns:mc="http://schemas.openxmlformats.org/markup-compatibility/2006" xmlns:p14="http://schemas.microsoft.com/office/powerpoint/2010/main">
+          <mc:Choice Requires="p14">
             <p:contentPart p14:bwMode="auto" r:id="rId30">
               <p14:nvContentPartPr>
                 <p14:cNvPr id="32" name="Ink 31">
@@ -13185,7 +14336,7 @@
               </p14:xfrm>
             </p:contentPart>
           </mc:Choice>
-          <mc:Fallback>
+          <mc:Fallback xmlns="">
             <p:pic>
               <p:nvPicPr>
                 <p:cNvPr id="32" name="Ink 31">
@@ -13216,8 +14367,8 @@
             </p:pic>
           </mc:Fallback>
         </mc:AlternateContent>
-        <mc:AlternateContent xmlns:mc="http://schemas.openxmlformats.org/markup-compatibility/2006">
-          <mc:Choice xmlns:p14="http://schemas.microsoft.com/office/powerpoint/2010/main" Requires="p14">
+        <mc:AlternateContent xmlns:mc="http://schemas.openxmlformats.org/markup-compatibility/2006" xmlns:p14="http://schemas.microsoft.com/office/powerpoint/2010/main">
+          <mc:Choice Requires="p14">
             <p:contentPart p14:bwMode="auto" r:id="rId32">
               <p14:nvContentPartPr>
                 <p14:cNvPr id="33" name="Ink 32">
@@ -13236,7 +14387,7 @@
               </p14:xfrm>
             </p:contentPart>
           </mc:Choice>
-          <mc:Fallback>
+          <mc:Fallback xmlns="">
             <p:pic>
               <p:nvPicPr>
                 <p:cNvPr id="33" name="Ink 32">
@@ -13267,8 +14418,8 @@
             </p:pic>
           </mc:Fallback>
         </mc:AlternateContent>
-        <mc:AlternateContent xmlns:mc="http://schemas.openxmlformats.org/markup-compatibility/2006">
-          <mc:Choice xmlns:p14="http://schemas.microsoft.com/office/powerpoint/2010/main" Requires="p14">
+        <mc:AlternateContent xmlns:mc="http://schemas.openxmlformats.org/markup-compatibility/2006" xmlns:p14="http://schemas.microsoft.com/office/powerpoint/2010/main">
+          <mc:Choice Requires="p14">
             <p:contentPart p14:bwMode="auto" r:id="rId34">
               <p14:nvContentPartPr>
                 <p14:cNvPr id="34" name="Ink 33">
@@ -13287,7 +14438,7 @@
               </p14:xfrm>
             </p:contentPart>
           </mc:Choice>
-          <mc:Fallback>
+          <mc:Fallback xmlns="">
             <p:pic>
               <p:nvPicPr>
                 <p:cNvPr id="34" name="Ink 33">
@@ -13318,8 +14469,8 @@
             </p:pic>
           </mc:Fallback>
         </mc:AlternateContent>
-        <mc:AlternateContent xmlns:mc="http://schemas.openxmlformats.org/markup-compatibility/2006">
-          <mc:Choice xmlns:p14="http://schemas.microsoft.com/office/powerpoint/2010/main" Requires="p14">
+        <mc:AlternateContent xmlns:mc="http://schemas.openxmlformats.org/markup-compatibility/2006" xmlns:p14="http://schemas.microsoft.com/office/powerpoint/2010/main">
+          <mc:Choice Requires="p14">
             <p:contentPart p14:bwMode="auto" r:id="rId36">
               <p14:nvContentPartPr>
                 <p14:cNvPr id="35" name="Ink 34">
@@ -13338,7 +14489,7 @@
               </p14:xfrm>
             </p:contentPart>
           </mc:Choice>
-          <mc:Fallback>
+          <mc:Fallback xmlns="">
             <p:pic>
               <p:nvPicPr>
                 <p:cNvPr id="35" name="Ink 34">
@@ -13369,8 +14520,8 @@
             </p:pic>
           </mc:Fallback>
         </mc:AlternateContent>
-        <mc:AlternateContent xmlns:mc="http://schemas.openxmlformats.org/markup-compatibility/2006">
-          <mc:Choice xmlns:p14="http://schemas.microsoft.com/office/powerpoint/2010/main" Requires="p14">
+        <mc:AlternateContent xmlns:mc="http://schemas.openxmlformats.org/markup-compatibility/2006" xmlns:p14="http://schemas.microsoft.com/office/powerpoint/2010/main">
+          <mc:Choice Requires="p14">
             <p:contentPart p14:bwMode="auto" r:id="rId38">
               <p14:nvContentPartPr>
                 <p14:cNvPr id="36" name="Ink 35">
@@ -13389,7 +14540,7 @@
               </p14:xfrm>
             </p:contentPart>
           </mc:Choice>
-          <mc:Fallback>
+          <mc:Fallback xmlns="">
             <p:pic>
               <p:nvPicPr>
                 <p:cNvPr id="36" name="Ink 35">
@@ -13420,8 +14571,8 @@
             </p:pic>
           </mc:Fallback>
         </mc:AlternateContent>
-        <mc:AlternateContent xmlns:mc="http://schemas.openxmlformats.org/markup-compatibility/2006">
-          <mc:Choice xmlns:p14="http://schemas.microsoft.com/office/powerpoint/2010/main" Requires="p14">
+        <mc:AlternateContent xmlns:mc="http://schemas.openxmlformats.org/markup-compatibility/2006" xmlns:p14="http://schemas.microsoft.com/office/powerpoint/2010/main">
+          <mc:Choice Requires="p14">
             <p:contentPart p14:bwMode="auto" r:id="rId40">
               <p14:nvContentPartPr>
                 <p14:cNvPr id="37" name="Ink 36">
@@ -13440,7 +14591,7 @@
               </p14:xfrm>
             </p:contentPart>
           </mc:Choice>
-          <mc:Fallback>
+          <mc:Fallback xmlns="">
             <p:pic>
               <p:nvPicPr>
                 <p:cNvPr id="37" name="Ink 36">
@@ -13471,8 +14622,8 @@
             </p:pic>
           </mc:Fallback>
         </mc:AlternateContent>
-        <mc:AlternateContent xmlns:mc="http://schemas.openxmlformats.org/markup-compatibility/2006">
-          <mc:Choice xmlns:p14="http://schemas.microsoft.com/office/powerpoint/2010/main" Requires="p14">
+        <mc:AlternateContent xmlns:mc="http://schemas.openxmlformats.org/markup-compatibility/2006" xmlns:p14="http://schemas.microsoft.com/office/powerpoint/2010/main">
+          <mc:Choice Requires="p14">
             <p:contentPart p14:bwMode="auto" r:id="rId42">
               <p14:nvContentPartPr>
                 <p14:cNvPr id="38" name="Ink 37">
@@ -13491,7 +14642,7 @@
               </p14:xfrm>
             </p:contentPart>
           </mc:Choice>
-          <mc:Fallback>
+          <mc:Fallback xmlns="">
             <p:pic>
               <p:nvPicPr>
                 <p:cNvPr id="38" name="Ink 37">
@@ -13522,8 +14673,8 @@
             </p:pic>
           </mc:Fallback>
         </mc:AlternateContent>
-        <mc:AlternateContent xmlns:mc="http://schemas.openxmlformats.org/markup-compatibility/2006">
-          <mc:Choice xmlns:p14="http://schemas.microsoft.com/office/powerpoint/2010/main" Requires="p14">
+        <mc:AlternateContent xmlns:mc="http://schemas.openxmlformats.org/markup-compatibility/2006" xmlns:p14="http://schemas.microsoft.com/office/powerpoint/2010/main">
+          <mc:Choice Requires="p14">
             <p:contentPart p14:bwMode="auto" r:id="rId44">
               <p14:nvContentPartPr>
                 <p14:cNvPr id="39" name="Ink 38">
@@ -13542,7 +14693,7 @@
               </p14:xfrm>
             </p:contentPart>
           </mc:Choice>
-          <mc:Fallback>
+          <mc:Fallback xmlns="">
             <p:pic>
               <p:nvPicPr>
                 <p:cNvPr id="39" name="Ink 38">
@@ -13594,8 +14745,8 @@
             <a:chExt cx="531000" cy="679680"/>
           </a:xfrm>
         </p:grpSpPr>
-        <mc:AlternateContent xmlns:mc="http://schemas.openxmlformats.org/markup-compatibility/2006">
-          <mc:Choice xmlns:p14="http://schemas.microsoft.com/office/powerpoint/2010/main" Requires="p14">
+        <mc:AlternateContent xmlns:mc="http://schemas.openxmlformats.org/markup-compatibility/2006" xmlns:p14="http://schemas.microsoft.com/office/powerpoint/2010/main">
+          <mc:Choice Requires="p14">
             <p:contentPart p14:bwMode="auto" r:id="rId46">
               <p14:nvContentPartPr>
                 <p14:cNvPr id="41" name="Ink 40">
@@ -13614,7 +14765,7 @@
               </p14:xfrm>
             </p:contentPart>
           </mc:Choice>
-          <mc:Fallback>
+          <mc:Fallback xmlns="">
             <p:pic>
               <p:nvPicPr>
                 <p:cNvPr id="41" name="Ink 40">
@@ -13645,8 +14796,8 @@
             </p:pic>
           </mc:Fallback>
         </mc:AlternateContent>
-        <mc:AlternateContent xmlns:mc="http://schemas.openxmlformats.org/markup-compatibility/2006">
-          <mc:Choice xmlns:p14="http://schemas.microsoft.com/office/powerpoint/2010/main" Requires="p14">
+        <mc:AlternateContent xmlns:mc="http://schemas.openxmlformats.org/markup-compatibility/2006" xmlns:p14="http://schemas.microsoft.com/office/powerpoint/2010/main">
+          <mc:Choice Requires="p14">
             <p:contentPart p14:bwMode="auto" r:id="rId48">
               <p14:nvContentPartPr>
                 <p14:cNvPr id="42" name="Ink 41">
@@ -13665,7 +14816,7 @@
               </p14:xfrm>
             </p:contentPart>
           </mc:Choice>
-          <mc:Fallback>
+          <mc:Fallback xmlns="">
             <p:pic>
               <p:nvPicPr>
                 <p:cNvPr id="42" name="Ink 41">
@@ -13696,8 +14847,8 @@
             </p:pic>
           </mc:Fallback>
         </mc:AlternateContent>
-        <mc:AlternateContent xmlns:mc="http://schemas.openxmlformats.org/markup-compatibility/2006">
-          <mc:Choice xmlns:p14="http://schemas.microsoft.com/office/powerpoint/2010/main" Requires="p14">
+        <mc:AlternateContent xmlns:mc="http://schemas.openxmlformats.org/markup-compatibility/2006" xmlns:p14="http://schemas.microsoft.com/office/powerpoint/2010/main">
+          <mc:Choice Requires="p14">
             <p:contentPart p14:bwMode="auto" r:id="rId50">
               <p14:nvContentPartPr>
                 <p14:cNvPr id="43" name="Ink 42">
@@ -13716,7 +14867,7 @@
               </p14:xfrm>
             </p:contentPart>
           </mc:Choice>
-          <mc:Fallback>
+          <mc:Fallback xmlns="">
             <p:pic>
               <p:nvPicPr>
                 <p:cNvPr id="43" name="Ink 42">
@@ -13748,8 +14899,8 @@
           </mc:Fallback>
         </mc:AlternateContent>
       </p:grpSp>
-      <mc:AlternateContent xmlns:mc="http://schemas.openxmlformats.org/markup-compatibility/2006">
-        <mc:Choice xmlns:p14="http://schemas.microsoft.com/office/powerpoint/2010/main" Requires="p14">
+      <mc:AlternateContent xmlns:mc="http://schemas.openxmlformats.org/markup-compatibility/2006" xmlns:p14="http://schemas.microsoft.com/office/powerpoint/2010/main">
+        <mc:Choice Requires="p14">
           <p:contentPart p14:bwMode="auto" r:id="rId52">
             <p14:nvContentPartPr>
               <p14:cNvPr id="44" name="Ink 43">
@@ -13768,7 +14919,7 @@
             </p14:xfrm>
           </p:contentPart>
         </mc:Choice>
-        <mc:Fallback>
+        <mc:Fallback xmlns="">
           <p:pic>
             <p:nvPicPr>
               <p:cNvPr id="44" name="Ink 43">
@@ -13799,8 +14950,8 @@
           </p:pic>
         </mc:Fallback>
       </mc:AlternateContent>
-      <mc:AlternateContent xmlns:mc="http://schemas.openxmlformats.org/markup-compatibility/2006">
-        <mc:Choice xmlns:p14="http://schemas.microsoft.com/office/powerpoint/2010/main" Requires="p14">
+      <mc:AlternateContent xmlns:mc="http://schemas.openxmlformats.org/markup-compatibility/2006" xmlns:p14="http://schemas.microsoft.com/office/powerpoint/2010/main">
+        <mc:Choice Requires="p14">
           <p:contentPart p14:bwMode="auto" r:id="rId54">
             <p14:nvContentPartPr>
               <p14:cNvPr id="46" name="Ink 45">
@@ -13819,7 +14970,7 @@
             </p14:xfrm>
           </p:contentPart>
         </mc:Choice>
-        <mc:Fallback>
+        <mc:Fallback xmlns="">
           <p:pic>
             <p:nvPicPr>
               <p:cNvPr id="46" name="Ink 45">
@@ -13850,8 +15001,8 @@
           </p:pic>
         </mc:Fallback>
       </mc:AlternateContent>
-      <mc:AlternateContent xmlns:mc="http://schemas.openxmlformats.org/markup-compatibility/2006">
-        <mc:Choice xmlns:p14="http://schemas.microsoft.com/office/powerpoint/2010/main" Requires="p14">
+      <mc:AlternateContent xmlns:mc="http://schemas.openxmlformats.org/markup-compatibility/2006" xmlns:p14="http://schemas.microsoft.com/office/powerpoint/2010/main">
+        <mc:Choice Requires="p14">
           <p:contentPart p14:bwMode="auto" r:id="rId56">
             <p14:nvContentPartPr>
               <p14:cNvPr id="47" name="Ink 46">
@@ -13870,7 +15021,7 @@
             </p14:xfrm>
           </p:contentPart>
         </mc:Choice>
-        <mc:Fallback>
+        <mc:Fallback xmlns="">
           <p:pic>
             <p:nvPicPr>
               <p:cNvPr id="47" name="Ink 46">
@@ -13901,8 +15052,8 @@
           </p:pic>
         </mc:Fallback>
       </mc:AlternateContent>
-      <mc:AlternateContent xmlns:mc="http://schemas.openxmlformats.org/markup-compatibility/2006">
-        <mc:Choice xmlns:p14="http://schemas.microsoft.com/office/powerpoint/2010/main" Requires="p14">
+      <mc:AlternateContent xmlns:mc="http://schemas.openxmlformats.org/markup-compatibility/2006" xmlns:p14="http://schemas.microsoft.com/office/powerpoint/2010/main">
+        <mc:Choice Requires="p14">
           <p:contentPart p14:bwMode="auto" r:id="rId58">
             <p14:nvContentPartPr>
               <p14:cNvPr id="61" name="Ink 60">
@@ -13921,7 +15072,7 @@
             </p14:xfrm>
           </p:contentPart>
         </mc:Choice>
-        <mc:Fallback>
+        <mc:Fallback xmlns="">
           <p:pic>
             <p:nvPicPr>
               <p:cNvPr id="61" name="Ink 60">
@@ -13952,8 +15103,8 @@
           </p:pic>
         </mc:Fallback>
       </mc:AlternateContent>
-      <mc:AlternateContent xmlns:mc="http://schemas.openxmlformats.org/markup-compatibility/2006">
-        <mc:Choice xmlns:p14="http://schemas.microsoft.com/office/powerpoint/2010/main" Requires="p14">
+      <mc:AlternateContent xmlns:mc="http://schemas.openxmlformats.org/markup-compatibility/2006" xmlns:p14="http://schemas.microsoft.com/office/powerpoint/2010/main">
+        <mc:Choice Requires="p14">
           <p:contentPart p14:bwMode="auto" r:id="rId60">
             <p14:nvContentPartPr>
               <p14:cNvPr id="62" name="Ink 61">
@@ -13972,7 +15123,7 @@
             </p14:xfrm>
           </p:contentPart>
         </mc:Choice>
-        <mc:Fallback>
+        <mc:Fallback xmlns="">
           <p:pic>
             <p:nvPicPr>
               <p:cNvPr id="62" name="Ink 61">
@@ -14023,8 +15174,8 @@
             <a:chExt cx="5975640" cy="1488240"/>
           </a:xfrm>
         </p:grpSpPr>
-        <mc:AlternateContent xmlns:mc="http://schemas.openxmlformats.org/markup-compatibility/2006">
-          <mc:Choice xmlns:p14="http://schemas.microsoft.com/office/powerpoint/2010/main" Requires="p14">
+        <mc:AlternateContent xmlns:mc="http://schemas.openxmlformats.org/markup-compatibility/2006" xmlns:p14="http://schemas.microsoft.com/office/powerpoint/2010/main">
+          <mc:Choice Requires="p14">
             <p:contentPart p14:bwMode="auto" r:id="rId62">
               <p14:nvContentPartPr>
                 <p14:cNvPr id="48" name="Ink 47">
@@ -14043,7 +15194,7 @@
               </p14:xfrm>
             </p:contentPart>
           </mc:Choice>
-          <mc:Fallback>
+          <mc:Fallback xmlns="">
             <p:pic>
               <p:nvPicPr>
                 <p:cNvPr id="48" name="Ink 47">
@@ -14074,8 +15225,8 @@
             </p:pic>
           </mc:Fallback>
         </mc:AlternateContent>
-        <mc:AlternateContent xmlns:mc="http://schemas.openxmlformats.org/markup-compatibility/2006">
-          <mc:Choice xmlns:p14="http://schemas.microsoft.com/office/powerpoint/2010/main" Requires="p14">
+        <mc:AlternateContent xmlns:mc="http://schemas.openxmlformats.org/markup-compatibility/2006" xmlns:p14="http://schemas.microsoft.com/office/powerpoint/2010/main">
+          <mc:Choice Requires="p14">
             <p:contentPart p14:bwMode="auto" r:id="rId64">
               <p14:nvContentPartPr>
                 <p14:cNvPr id="49" name="Ink 48">
@@ -14094,7 +15245,7 @@
               </p14:xfrm>
             </p:contentPart>
           </mc:Choice>
-          <mc:Fallback>
+          <mc:Fallback xmlns="">
             <p:pic>
               <p:nvPicPr>
                 <p:cNvPr id="49" name="Ink 48">
@@ -14125,8 +15276,8 @@
             </p:pic>
           </mc:Fallback>
         </mc:AlternateContent>
-        <mc:AlternateContent xmlns:mc="http://schemas.openxmlformats.org/markup-compatibility/2006">
-          <mc:Choice xmlns:p14="http://schemas.microsoft.com/office/powerpoint/2010/main" Requires="p14">
+        <mc:AlternateContent xmlns:mc="http://schemas.openxmlformats.org/markup-compatibility/2006" xmlns:p14="http://schemas.microsoft.com/office/powerpoint/2010/main">
+          <mc:Choice Requires="p14">
             <p:contentPart p14:bwMode="auto" r:id="rId66">
               <p14:nvContentPartPr>
                 <p14:cNvPr id="50" name="Ink 49">
@@ -14145,7 +15296,7 @@
               </p14:xfrm>
             </p:contentPart>
           </mc:Choice>
-          <mc:Fallback>
+          <mc:Fallback xmlns="">
             <p:pic>
               <p:nvPicPr>
                 <p:cNvPr id="50" name="Ink 49">
@@ -14176,8 +15327,8 @@
             </p:pic>
           </mc:Fallback>
         </mc:AlternateContent>
-        <mc:AlternateContent xmlns:mc="http://schemas.openxmlformats.org/markup-compatibility/2006">
-          <mc:Choice xmlns:p14="http://schemas.microsoft.com/office/powerpoint/2010/main" Requires="p14">
+        <mc:AlternateContent xmlns:mc="http://schemas.openxmlformats.org/markup-compatibility/2006" xmlns:p14="http://schemas.microsoft.com/office/powerpoint/2010/main">
+          <mc:Choice Requires="p14">
             <p:contentPart p14:bwMode="auto" r:id="rId68">
               <p14:nvContentPartPr>
                 <p14:cNvPr id="51" name="Ink 50">
@@ -14196,7 +15347,7 @@
               </p14:xfrm>
             </p:contentPart>
           </mc:Choice>
-          <mc:Fallback>
+          <mc:Fallback xmlns="">
             <p:pic>
               <p:nvPicPr>
                 <p:cNvPr id="51" name="Ink 50">
@@ -14227,8 +15378,8 @@
             </p:pic>
           </mc:Fallback>
         </mc:AlternateContent>
-        <mc:AlternateContent xmlns:mc="http://schemas.openxmlformats.org/markup-compatibility/2006">
-          <mc:Choice xmlns:p14="http://schemas.microsoft.com/office/powerpoint/2010/main" Requires="p14">
+        <mc:AlternateContent xmlns:mc="http://schemas.openxmlformats.org/markup-compatibility/2006" xmlns:p14="http://schemas.microsoft.com/office/powerpoint/2010/main">
+          <mc:Choice Requires="p14">
             <p:contentPart p14:bwMode="auto" r:id="rId70">
               <p14:nvContentPartPr>
                 <p14:cNvPr id="52" name="Ink 51">
@@ -14247,7 +15398,7 @@
               </p14:xfrm>
             </p:contentPart>
           </mc:Choice>
-          <mc:Fallback>
+          <mc:Fallback xmlns="">
             <p:pic>
               <p:nvPicPr>
                 <p:cNvPr id="52" name="Ink 51">
@@ -14278,8 +15429,8 @@
             </p:pic>
           </mc:Fallback>
         </mc:AlternateContent>
-        <mc:AlternateContent xmlns:mc="http://schemas.openxmlformats.org/markup-compatibility/2006">
-          <mc:Choice xmlns:p14="http://schemas.microsoft.com/office/powerpoint/2010/main" Requires="p14">
+        <mc:AlternateContent xmlns:mc="http://schemas.openxmlformats.org/markup-compatibility/2006" xmlns:p14="http://schemas.microsoft.com/office/powerpoint/2010/main">
+          <mc:Choice Requires="p14">
             <p:contentPart p14:bwMode="auto" r:id="rId72">
               <p14:nvContentPartPr>
                 <p14:cNvPr id="53" name="Ink 52">
@@ -14298,7 +15449,7 @@
               </p14:xfrm>
             </p:contentPart>
           </mc:Choice>
-          <mc:Fallback>
+          <mc:Fallback xmlns="">
             <p:pic>
               <p:nvPicPr>
                 <p:cNvPr id="53" name="Ink 52">
@@ -14329,8 +15480,8 @@
             </p:pic>
           </mc:Fallback>
         </mc:AlternateContent>
-        <mc:AlternateContent xmlns:mc="http://schemas.openxmlformats.org/markup-compatibility/2006">
-          <mc:Choice xmlns:p14="http://schemas.microsoft.com/office/powerpoint/2010/main" Requires="p14">
+        <mc:AlternateContent xmlns:mc="http://schemas.openxmlformats.org/markup-compatibility/2006" xmlns:p14="http://schemas.microsoft.com/office/powerpoint/2010/main">
+          <mc:Choice Requires="p14">
             <p:contentPart p14:bwMode="auto" r:id="rId74">
               <p14:nvContentPartPr>
                 <p14:cNvPr id="54" name="Ink 53">
@@ -14349,7 +15500,7 @@
               </p14:xfrm>
             </p:contentPart>
           </mc:Choice>
-          <mc:Fallback>
+          <mc:Fallback xmlns="">
             <p:pic>
               <p:nvPicPr>
                 <p:cNvPr id="54" name="Ink 53">
@@ -14380,8 +15531,8 @@
             </p:pic>
           </mc:Fallback>
         </mc:AlternateContent>
-        <mc:AlternateContent xmlns:mc="http://schemas.openxmlformats.org/markup-compatibility/2006">
-          <mc:Choice xmlns:p14="http://schemas.microsoft.com/office/powerpoint/2010/main" Requires="p14">
+        <mc:AlternateContent xmlns:mc="http://schemas.openxmlformats.org/markup-compatibility/2006" xmlns:p14="http://schemas.microsoft.com/office/powerpoint/2010/main">
+          <mc:Choice Requires="p14">
             <p:contentPart p14:bwMode="auto" r:id="rId76">
               <p14:nvContentPartPr>
                 <p14:cNvPr id="55" name="Ink 54">
@@ -14400,7 +15551,7 @@
               </p14:xfrm>
             </p:contentPart>
           </mc:Choice>
-          <mc:Fallback>
+          <mc:Fallback xmlns="">
             <p:pic>
               <p:nvPicPr>
                 <p:cNvPr id="55" name="Ink 54">
@@ -14431,8 +15582,8 @@
             </p:pic>
           </mc:Fallback>
         </mc:AlternateContent>
-        <mc:AlternateContent xmlns:mc="http://schemas.openxmlformats.org/markup-compatibility/2006">
-          <mc:Choice xmlns:p14="http://schemas.microsoft.com/office/powerpoint/2010/main" Requires="p14">
+        <mc:AlternateContent xmlns:mc="http://schemas.openxmlformats.org/markup-compatibility/2006" xmlns:p14="http://schemas.microsoft.com/office/powerpoint/2010/main">
+          <mc:Choice Requires="p14">
             <p:contentPart p14:bwMode="auto" r:id="rId78">
               <p14:nvContentPartPr>
                 <p14:cNvPr id="56" name="Ink 55">
@@ -14451,7 +15602,7 @@
               </p14:xfrm>
             </p:contentPart>
           </mc:Choice>
-          <mc:Fallback>
+          <mc:Fallback xmlns="">
             <p:pic>
               <p:nvPicPr>
                 <p:cNvPr id="56" name="Ink 55">
@@ -14482,8 +15633,8 @@
             </p:pic>
           </mc:Fallback>
         </mc:AlternateContent>
-        <mc:AlternateContent xmlns:mc="http://schemas.openxmlformats.org/markup-compatibility/2006">
-          <mc:Choice xmlns:p14="http://schemas.microsoft.com/office/powerpoint/2010/main" Requires="p14">
+        <mc:AlternateContent xmlns:mc="http://schemas.openxmlformats.org/markup-compatibility/2006" xmlns:p14="http://schemas.microsoft.com/office/powerpoint/2010/main">
+          <mc:Choice Requires="p14">
             <p:contentPart p14:bwMode="auto" r:id="rId80">
               <p14:nvContentPartPr>
                 <p14:cNvPr id="63" name="Ink 62">
@@ -14502,7 +15653,7 @@
               </p14:xfrm>
             </p:contentPart>
           </mc:Choice>
-          <mc:Fallback>
+          <mc:Fallback xmlns="">
             <p:pic>
               <p:nvPicPr>
                 <p:cNvPr id="63" name="Ink 62">
@@ -14533,8 +15684,8 @@
             </p:pic>
           </mc:Fallback>
         </mc:AlternateContent>
-        <mc:AlternateContent xmlns:mc="http://schemas.openxmlformats.org/markup-compatibility/2006">
-          <mc:Choice xmlns:p14="http://schemas.microsoft.com/office/powerpoint/2010/main" Requires="p14">
+        <mc:AlternateContent xmlns:mc="http://schemas.openxmlformats.org/markup-compatibility/2006" xmlns:p14="http://schemas.microsoft.com/office/powerpoint/2010/main">
+          <mc:Choice Requires="p14">
             <p:contentPart p14:bwMode="auto" r:id="rId82">
               <p14:nvContentPartPr>
                 <p14:cNvPr id="64" name="Ink 63">
@@ -14553,7 +15704,7 @@
               </p14:xfrm>
             </p:contentPart>
           </mc:Choice>
-          <mc:Fallback>
+          <mc:Fallback xmlns="">
             <p:pic>
               <p:nvPicPr>
                 <p:cNvPr id="64" name="Ink 63">
@@ -14584,8 +15735,8 @@
             </p:pic>
           </mc:Fallback>
         </mc:AlternateContent>
-        <mc:AlternateContent xmlns:mc="http://schemas.openxmlformats.org/markup-compatibility/2006">
-          <mc:Choice xmlns:p14="http://schemas.microsoft.com/office/powerpoint/2010/main" Requires="p14">
+        <mc:AlternateContent xmlns:mc="http://schemas.openxmlformats.org/markup-compatibility/2006" xmlns:p14="http://schemas.microsoft.com/office/powerpoint/2010/main">
+          <mc:Choice Requires="p14">
             <p:contentPart p14:bwMode="auto" r:id="rId84">
               <p14:nvContentPartPr>
                 <p14:cNvPr id="65" name="Ink 64">
@@ -14604,7 +15755,7 @@
               </p14:xfrm>
             </p:contentPart>
           </mc:Choice>
-          <mc:Fallback>
+          <mc:Fallback xmlns="">
             <p:pic>
               <p:nvPicPr>
                 <p:cNvPr id="65" name="Ink 64">
@@ -14635,8 +15786,8 @@
             </p:pic>
           </mc:Fallback>
         </mc:AlternateContent>
-        <mc:AlternateContent xmlns:mc="http://schemas.openxmlformats.org/markup-compatibility/2006">
-          <mc:Choice xmlns:p14="http://schemas.microsoft.com/office/powerpoint/2010/main" Requires="p14">
+        <mc:AlternateContent xmlns:mc="http://schemas.openxmlformats.org/markup-compatibility/2006" xmlns:p14="http://schemas.microsoft.com/office/powerpoint/2010/main">
+          <mc:Choice Requires="p14">
             <p:contentPart p14:bwMode="auto" r:id="rId86">
               <p14:nvContentPartPr>
                 <p14:cNvPr id="66" name="Ink 65">
@@ -14655,7 +15806,7 @@
               </p14:xfrm>
             </p:contentPart>
           </mc:Choice>
-          <mc:Fallback>
+          <mc:Fallback xmlns="">
             <p:pic>
               <p:nvPicPr>
                 <p:cNvPr id="66" name="Ink 65">
@@ -14686,8 +15837,8 @@
             </p:pic>
           </mc:Fallback>
         </mc:AlternateContent>
-        <mc:AlternateContent xmlns:mc="http://schemas.openxmlformats.org/markup-compatibility/2006">
-          <mc:Choice xmlns:p14="http://schemas.microsoft.com/office/powerpoint/2010/main" Requires="p14">
+        <mc:AlternateContent xmlns:mc="http://schemas.openxmlformats.org/markup-compatibility/2006" xmlns:p14="http://schemas.microsoft.com/office/powerpoint/2010/main">
+          <mc:Choice Requires="p14">
             <p:contentPart p14:bwMode="auto" r:id="rId88">
               <p14:nvContentPartPr>
                 <p14:cNvPr id="67" name="Ink 66">
@@ -14706,7 +15857,7 @@
               </p14:xfrm>
             </p:contentPart>
           </mc:Choice>
-          <mc:Fallback>
+          <mc:Fallback xmlns="">
             <p:pic>
               <p:nvPicPr>
                 <p:cNvPr id="67" name="Ink 66">
@@ -14738,8 +15889,8 @@
           </mc:Fallback>
         </mc:AlternateContent>
       </p:grpSp>
-      <mc:AlternateContent xmlns:mc="http://schemas.openxmlformats.org/markup-compatibility/2006">
-        <mc:Choice xmlns:p14="http://schemas.microsoft.com/office/powerpoint/2010/main" Requires="p14">
+      <mc:AlternateContent xmlns:mc="http://schemas.openxmlformats.org/markup-compatibility/2006" xmlns:p14="http://schemas.microsoft.com/office/powerpoint/2010/main">
+        <mc:Choice Requires="p14">
           <p:contentPart p14:bwMode="auto" r:id="rId90">
             <p14:nvContentPartPr>
               <p14:cNvPr id="70" name="Ink 69">
@@ -14758,7 +15909,7 @@
             </p14:xfrm>
           </p:contentPart>
         </mc:Choice>
-        <mc:Fallback>
+        <mc:Fallback xmlns="">
           <p:pic>
             <p:nvPicPr>
               <p:cNvPr id="70" name="Ink 69">
@@ -14789,8 +15940,8 @@
           </p:pic>
         </mc:Fallback>
       </mc:AlternateContent>
-      <mc:AlternateContent xmlns:mc="http://schemas.openxmlformats.org/markup-compatibility/2006">
-        <mc:Choice xmlns:p14="http://schemas.microsoft.com/office/powerpoint/2010/main" Requires="p14">
+      <mc:AlternateContent xmlns:mc="http://schemas.openxmlformats.org/markup-compatibility/2006" xmlns:p14="http://schemas.microsoft.com/office/powerpoint/2010/main">
+        <mc:Choice Requires="p14">
           <p:contentPart p14:bwMode="auto" r:id="rId92">
             <p14:nvContentPartPr>
               <p14:cNvPr id="71" name="Ink 70">
@@ -14809,7 +15960,7 @@
             </p14:xfrm>
           </p:contentPart>
         </mc:Choice>
-        <mc:Fallback>
+        <mc:Fallback xmlns="">
           <p:pic>
             <p:nvPicPr>
               <p:cNvPr id="71" name="Ink 70">
@@ -14840,8 +15991,8 @@
           </p:pic>
         </mc:Fallback>
       </mc:AlternateContent>
-      <mc:AlternateContent xmlns:mc="http://schemas.openxmlformats.org/markup-compatibility/2006">
-        <mc:Choice xmlns:p14="http://schemas.microsoft.com/office/powerpoint/2010/main" Requires="p14">
+      <mc:AlternateContent xmlns:mc="http://schemas.openxmlformats.org/markup-compatibility/2006" xmlns:p14="http://schemas.microsoft.com/office/powerpoint/2010/main">
+        <mc:Choice Requires="p14">
           <p:contentPart p14:bwMode="auto" r:id="rId94">
             <p14:nvContentPartPr>
               <p14:cNvPr id="72" name="Ink 71">
@@ -14860,7 +16011,7 @@
             </p14:xfrm>
           </p:contentPart>
         </mc:Choice>
-        <mc:Fallback>
+        <mc:Fallback xmlns="">
           <p:pic>
             <p:nvPicPr>
               <p:cNvPr id="72" name="Ink 71">
@@ -14891,8 +16042,8 @@
           </p:pic>
         </mc:Fallback>
       </mc:AlternateContent>
-      <mc:AlternateContent xmlns:mc="http://schemas.openxmlformats.org/markup-compatibility/2006">
-        <mc:Choice xmlns:p14="http://schemas.microsoft.com/office/powerpoint/2010/main" Requires="p14">
+      <mc:AlternateContent xmlns:mc="http://schemas.openxmlformats.org/markup-compatibility/2006" xmlns:p14="http://schemas.microsoft.com/office/powerpoint/2010/main">
+        <mc:Choice Requires="p14">
           <p:contentPart p14:bwMode="auto" r:id="rId96">
             <p14:nvContentPartPr>
               <p14:cNvPr id="73" name="Ink 72">
@@ -14911,7 +16062,7 @@
             </p14:xfrm>
           </p:contentPart>
         </mc:Choice>
-        <mc:Fallback>
+        <mc:Fallback xmlns="">
           <p:pic>
             <p:nvPicPr>
               <p:cNvPr id="73" name="Ink 72">
@@ -15067,8 +16218,8 @@
             <a:chExt cx="1656720" cy="1146240"/>
           </a:xfrm>
         </p:grpSpPr>
-        <mc:AlternateContent xmlns:mc="http://schemas.openxmlformats.org/markup-compatibility/2006">
-          <mc:Choice xmlns:p14="http://schemas.microsoft.com/office/powerpoint/2010/main" Requires="p14">
+        <mc:AlternateContent xmlns:mc="http://schemas.openxmlformats.org/markup-compatibility/2006" xmlns:p14="http://schemas.microsoft.com/office/powerpoint/2010/main">
+          <mc:Choice Requires="p14">
             <p:contentPart p14:bwMode="auto" r:id="rId98">
               <p14:nvContentPartPr>
                 <p14:cNvPr id="98" name="Ink 97">
@@ -15087,7 +16238,7 @@
               </p14:xfrm>
             </p:contentPart>
           </mc:Choice>
-          <mc:Fallback>
+          <mc:Fallback xmlns="">
             <p:pic>
               <p:nvPicPr>
                 <p:cNvPr id="98" name="Ink 97">
@@ -15118,8 +16269,8 @@
             </p:pic>
           </mc:Fallback>
         </mc:AlternateContent>
-        <mc:AlternateContent xmlns:mc="http://schemas.openxmlformats.org/markup-compatibility/2006">
-          <mc:Choice xmlns:p14="http://schemas.microsoft.com/office/powerpoint/2010/main" Requires="p14">
+        <mc:AlternateContent xmlns:mc="http://schemas.openxmlformats.org/markup-compatibility/2006" xmlns:p14="http://schemas.microsoft.com/office/powerpoint/2010/main">
+          <mc:Choice Requires="p14">
             <p:contentPart p14:bwMode="auto" r:id="rId100">
               <p14:nvContentPartPr>
                 <p14:cNvPr id="99" name="Ink 98">
@@ -15138,7 +16289,7 @@
               </p14:xfrm>
             </p:contentPart>
           </mc:Choice>
-          <mc:Fallback>
+          <mc:Fallback xmlns="">
             <p:pic>
               <p:nvPicPr>
                 <p:cNvPr id="99" name="Ink 98">
@@ -15169,8 +16320,8 @@
             </p:pic>
           </mc:Fallback>
         </mc:AlternateContent>
-        <mc:AlternateContent xmlns:mc="http://schemas.openxmlformats.org/markup-compatibility/2006">
-          <mc:Choice xmlns:p14="http://schemas.microsoft.com/office/powerpoint/2010/main" Requires="p14">
+        <mc:AlternateContent xmlns:mc="http://schemas.openxmlformats.org/markup-compatibility/2006" xmlns:p14="http://schemas.microsoft.com/office/powerpoint/2010/main">
+          <mc:Choice Requires="p14">
             <p:contentPart p14:bwMode="auto" r:id="rId102">
               <p14:nvContentPartPr>
                 <p14:cNvPr id="100" name="Ink 99">
@@ -15189,7 +16340,7 @@
               </p14:xfrm>
             </p:contentPart>
           </mc:Choice>
-          <mc:Fallback>
+          <mc:Fallback xmlns="">
             <p:pic>
               <p:nvPicPr>
                 <p:cNvPr id="100" name="Ink 99">
@@ -15256,8 +16407,8 @@
           </a:p>
         </p:txBody>
       </p:sp>
-      <mc:AlternateContent xmlns:mc="http://schemas.openxmlformats.org/markup-compatibility/2006">
-        <mc:Choice xmlns:p14="http://schemas.microsoft.com/office/powerpoint/2010/main" Requires="p14">
+      <mc:AlternateContent xmlns:mc="http://schemas.openxmlformats.org/markup-compatibility/2006" xmlns:p14="http://schemas.microsoft.com/office/powerpoint/2010/main">
+        <mc:Choice Requires="p14">
           <p:contentPart p14:bwMode="auto" r:id="rId104">
             <p14:nvContentPartPr>
               <p14:cNvPr id="102" name="Ink 101">
@@ -15276,7 +16427,7 @@
             </p14:xfrm>
           </p:contentPart>
         </mc:Choice>
-        <mc:Fallback>
+        <mc:Fallback xmlns="">
           <p:pic>
             <p:nvPicPr>
               <p:cNvPr id="102" name="Ink 101">
@@ -15307,8 +16458,8 @@
           </p:pic>
         </mc:Fallback>
       </mc:AlternateContent>
-      <mc:AlternateContent xmlns:mc="http://schemas.openxmlformats.org/markup-compatibility/2006">
-        <mc:Choice xmlns:p14="http://schemas.microsoft.com/office/powerpoint/2010/main" Requires="p14">
+      <mc:AlternateContent xmlns:mc="http://schemas.openxmlformats.org/markup-compatibility/2006" xmlns:p14="http://schemas.microsoft.com/office/powerpoint/2010/main">
+        <mc:Choice Requires="p14">
           <p:contentPart p14:bwMode="auto" r:id="rId106">
             <p14:nvContentPartPr>
               <p14:cNvPr id="103" name="Ink 102">
@@ -15327,7 +16478,7 @@
             </p14:xfrm>
           </p:contentPart>
         </mc:Choice>
-        <mc:Fallback>
+        <mc:Fallback xmlns="">
           <p:pic>
             <p:nvPicPr>
               <p:cNvPr id="103" name="Ink 102">
@@ -15371,7 +16522,7 @@
 </p:sld>
 </file>
 
-<file path=ppt/slides/slide7.xml><?xml version="1.0" encoding="utf-8"?>
+<file path=ppt/slides/slide9.xml><?xml version="1.0" encoding="utf-8"?>
 <p:sld xmlns:a="http://schemas.openxmlformats.org/drawingml/2006/main" xmlns:r="http://schemas.openxmlformats.org/officeDocument/2006/relationships" xmlns:p="http://schemas.openxmlformats.org/presentationml/2006/main">
   <p:cSld>
     <p:spTree>
@@ -15466,7 +16617,7 @@
             <a:pPr lvl="1"/>
             <a:r>
               <a:rPr lang="en-US" dirty="0"/>
-              <a:t>Residuals between Y and mean-model is big. </a:t>
+              <a:t>Residuals between Y and mean-model is big. SS-total. </a:t>
             </a:r>
           </a:p>
           <a:p>
@@ -15479,7 +16630,7 @@
             <a:pPr lvl="1"/>
             <a:r>
               <a:rPr lang="en-US" dirty="0"/>
-              <a:t>Residuals w/ Y and regression-model is smaller. </a:t>
+              <a:t>Residuals w/ Y and regression-model is smaller. SS-error. </a:t>
             </a:r>
           </a:p>
           <a:p>
@@ -15492,7 +16643,7 @@
             <a:pPr lvl="1"/>
             <a:r>
               <a:rPr lang="en-US" dirty="0"/>
-              <a:t>R2=1 means we’ve explained everything, the pred is the real value. How close are we to that? </a:t>
+              <a:t>R2=1 means we’ve explained everything, the pred is the real value. How close are we to that? SS-regression.</a:t>
             </a:r>
           </a:p>
           <a:p>
@@ -15554,351 +16705,6 @@
     <p:extLst>
       <p:ext uri="{BB962C8B-B14F-4D97-AF65-F5344CB8AC3E}">
         <p14:creationId xmlns:p14="http://schemas.microsoft.com/office/powerpoint/2010/main" val="3677466657"/>
-      </p:ext>
-    </p:extLst>
-  </p:cSld>
-  <p:clrMapOvr>
-    <a:masterClrMapping/>
-  </p:clrMapOvr>
-</p:sld>
-</file>
-
-<file path=ppt/slides/slide8.xml><?xml version="1.0" encoding="utf-8"?>
-<p:sld xmlns:a="http://schemas.openxmlformats.org/drawingml/2006/main" xmlns:r="http://schemas.openxmlformats.org/officeDocument/2006/relationships" xmlns:p="http://schemas.openxmlformats.org/presentationml/2006/main">
-  <p:cSld>
-    <p:spTree>
-      <p:nvGrpSpPr>
-        <p:cNvPr id="1" name=""/>
-        <p:cNvGrpSpPr/>
-        <p:nvPr/>
-      </p:nvGrpSpPr>
-      <p:grpSpPr>
-        <a:xfrm>
-          <a:off x="0" y="0"/>
-          <a:ext cx="0" cy="0"/>
-          <a:chOff x="0" y="0"/>
-          <a:chExt cx="0" cy="0"/>
-        </a:xfrm>
-      </p:grpSpPr>
-      <p:sp>
-        <p:nvSpPr>
-          <p:cNvPr id="2" name="Title 1">
-            <a:extLst>
-              <a:ext uri="{FF2B5EF4-FFF2-40B4-BE49-F238E27FC236}">
-                <a16:creationId xmlns:a16="http://schemas.microsoft.com/office/drawing/2014/main" id="{CC4B3966-A021-E34C-DE84-31BA0514E05A}"/>
-              </a:ext>
-            </a:extLst>
-          </p:cNvPr>
-          <p:cNvSpPr>
-            <a:spLocks noGrp="1"/>
-          </p:cNvSpPr>
-          <p:nvPr>
-            <p:ph type="title"/>
-          </p:nvPr>
-        </p:nvSpPr>
-        <p:spPr/>
-        <p:txBody>
-          <a:bodyPr/>
-          <a:lstStyle/>
-          <a:p>
-            <a:r>
-              <a:rPr lang="en-US" dirty="0"/>
-              <a:t>So…</a:t>
-            </a:r>
-          </a:p>
-        </p:txBody>
-      </p:sp>
-      <p:sp>
-        <p:nvSpPr>
-          <p:cNvPr id="3" name="Content Placeholder 2">
-            <a:extLst>
-              <a:ext uri="{FF2B5EF4-FFF2-40B4-BE49-F238E27FC236}">
-                <a16:creationId xmlns:a16="http://schemas.microsoft.com/office/drawing/2014/main" id="{1ADFC4C7-56A0-A530-833F-7BF88EA3A477}"/>
-              </a:ext>
-            </a:extLst>
-          </p:cNvPr>
-          <p:cNvSpPr>
-            <a:spLocks noGrp="1"/>
-          </p:cNvSpPr>
-          <p:nvPr>
-            <p:ph idx="1"/>
-          </p:nvPr>
-        </p:nvSpPr>
-        <p:spPr>
-          <a:xfrm>
-            <a:off x="1451579" y="2015732"/>
-            <a:ext cx="9603275" cy="4037749"/>
-          </a:xfrm>
-        </p:spPr>
-        <p:txBody>
-          <a:bodyPr/>
-          <a:lstStyle/>
-          <a:p>
-            <a:r>
-              <a:rPr lang="en-US" dirty="0"/>
-              <a:t>The residuals can be measured and tallied into MSE/RMSE. </a:t>
-            </a:r>
-          </a:p>
-          <a:p>
-            <a:pPr lvl="1"/>
-            <a:r>
-              <a:rPr lang="en-US" dirty="0"/>
-              <a:t>Direct metric of error – how large are the average residuals(-</a:t>
-            </a:r>
-            <a:r>
-              <a:rPr lang="en-US" dirty="0" err="1"/>
-              <a:t>ish</a:t>
-            </a:r>
-            <a:r>
-              <a:rPr lang="en-US" dirty="0"/>
-              <a:t>). </a:t>
-            </a:r>
-          </a:p>
-          <a:p>
-            <a:r>
-              <a:rPr lang="en-US" dirty="0"/>
-              <a:t>The residuals also generate the R2, but with more arithmetic. </a:t>
-            </a:r>
-          </a:p>
-          <a:p>
-            <a:pPr lvl="1"/>
-            <a:r>
-              <a:rPr lang="en-US" dirty="0"/>
-              <a:t>The naïve (no X value) model is taken as the baseline, with large residuals. </a:t>
-            </a:r>
-          </a:p>
-          <a:p>
-            <a:pPr lvl="1"/>
-            <a:r>
-              <a:rPr lang="en-US" dirty="0"/>
-              <a:t>The new model with X is better, with smaller residuals. </a:t>
-            </a:r>
-          </a:p>
-          <a:p>
-            <a:pPr lvl="1"/>
-            <a:r>
-              <a:rPr lang="en-US" dirty="0"/>
-              <a:t>The amount of the original residuals we’ve explained, or removed, is ~R2. </a:t>
-            </a:r>
-          </a:p>
-          <a:p>
-            <a:pPr lvl="1"/>
-            <a:r>
-              <a:rPr lang="en-US" dirty="0"/>
-              <a:t>This is an indirect measure of error, but still residual based. </a:t>
-            </a:r>
-          </a:p>
-          <a:p>
-            <a:r>
-              <a:rPr lang="en-US" dirty="0"/>
-              <a:t>R2 is usually used as a default score for regression. </a:t>
-            </a:r>
-          </a:p>
-          <a:p>
-            <a:pPr lvl="1"/>
-            <a:r>
-              <a:rPr lang="en-US" dirty="0"/>
-              <a:t>Informally describes ‘fit’ – how well model matches data. </a:t>
-            </a:r>
-          </a:p>
-        </p:txBody>
-      </p:sp>
-    </p:spTree>
-    <p:extLst>
-      <p:ext uri="{BB962C8B-B14F-4D97-AF65-F5344CB8AC3E}">
-        <p14:creationId xmlns:p14="http://schemas.microsoft.com/office/powerpoint/2010/main" val="1144868392"/>
-      </p:ext>
-    </p:extLst>
-  </p:cSld>
-  <p:clrMapOvr>
-    <a:masterClrMapping/>
-  </p:clrMapOvr>
-</p:sld>
-</file>
-
-<file path=ppt/slides/slide9.xml><?xml version="1.0" encoding="utf-8"?>
-<p:sld xmlns:a="http://schemas.openxmlformats.org/drawingml/2006/main" xmlns:r="http://schemas.openxmlformats.org/officeDocument/2006/relationships" xmlns:p="http://schemas.openxmlformats.org/presentationml/2006/main">
-  <p:cSld>
-    <p:spTree>
-      <p:nvGrpSpPr>
-        <p:cNvPr id="1" name=""/>
-        <p:cNvGrpSpPr/>
-        <p:nvPr/>
-      </p:nvGrpSpPr>
-      <p:grpSpPr>
-        <a:xfrm>
-          <a:off x="0" y="0"/>
-          <a:ext cx="0" cy="0"/>
-          <a:chOff x="0" y="0"/>
-          <a:chExt cx="0" cy="0"/>
-        </a:xfrm>
-      </p:grpSpPr>
-      <p:sp>
-        <p:nvSpPr>
-          <p:cNvPr id="2" name="Title 1">
-            <a:extLst>
-              <a:ext uri="{FF2B5EF4-FFF2-40B4-BE49-F238E27FC236}">
-                <a16:creationId xmlns:a16="http://schemas.microsoft.com/office/drawing/2014/main" id="{6D7DC5C7-B219-BB65-D39E-2980D7949C0E}"/>
-              </a:ext>
-            </a:extLst>
-          </p:cNvPr>
-          <p:cNvSpPr>
-            <a:spLocks noGrp="1"/>
-          </p:cNvSpPr>
-          <p:nvPr>
-            <p:ph type="title"/>
-          </p:nvPr>
-        </p:nvSpPr>
-        <p:spPr/>
-        <p:txBody>
-          <a:bodyPr/>
-          <a:lstStyle/>
-          <a:p>
-            <a:r>
-              <a:rPr lang="en-US" dirty="0"/>
-              <a:t>Multiple Regression and R2</a:t>
-            </a:r>
-          </a:p>
-        </p:txBody>
-      </p:sp>
-      <p:sp>
-        <p:nvSpPr>
-          <p:cNvPr id="3" name="Content Placeholder 2">
-            <a:extLst>
-              <a:ext uri="{FF2B5EF4-FFF2-40B4-BE49-F238E27FC236}">
-                <a16:creationId xmlns:a16="http://schemas.microsoft.com/office/drawing/2014/main" id="{866B7B81-3BD7-7126-9487-A59B781DAAF1}"/>
-              </a:ext>
-            </a:extLst>
-          </p:cNvPr>
-          <p:cNvSpPr>
-            <a:spLocks noGrp="1"/>
-          </p:cNvSpPr>
-          <p:nvPr>
-            <p:ph idx="1"/>
-          </p:nvPr>
-        </p:nvSpPr>
-        <p:spPr>
-          <a:xfrm>
-            <a:off x="95693" y="2015732"/>
-            <a:ext cx="7651307" cy="4037749"/>
-          </a:xfrm>
-        </p:spPr>
-        <p:txBody>
-          <a:bodyPr/>
-          <a:lstStyle/>
-          <a:p>
-            <a:r>
-              <a:rPr lang="en-US" dirty="0"/>
-              <a:t>Multiple regression, with more than one X, works the same way. </a:t>
-            </a:r>
-          </a:p>
-          <a:p>
-            <a:pPr lvl="1"/>
-            <a:r>
-              <a:rPr lang="en-US" dirty="0"/>
-              <a:t>We have a target – Y. </a:t>
-            </a:r>
-          </a:p>
-          <a:p>
-            <a:pPr lvl="1"/>
-            <a:r>
-              <a:rPr lang="en-US" dirty="0"/>
-              <a:t>We have multiple inputs – X1, X2, X3….</a:t>
-            </a:r>
-          </a:p>
-          <a:p>
-            <a:pPr lvl="1"/>
-            <a:r>
-              <a:rPr lang="en-US" dirty="0"/>
-              <a:t>The concept works the same way, it’s just hard to visualize. </a:t>
-            </a:r>
-          </a:p>
-          <a:p>
-            <a:pPr lvl="1"/>
-            <a:r>
-              <a:rPr lang="en-US" dirty="0"/>
-              <a:t>Model is y = x1*m1+x2*m2+….b. </a:t>
-            </a:r>
-          </a:p>
-          <a:p>
-            <a:pPr lvl="1"/>
-            <a:r>
-              <a:rPr lang="en-US" dirty="0"/>
-              <a:t>Coefficients are weightings of input contributions*. </a:t>
-            </a:r>
-          </a:p>
-          <a:p>
-            <a:r>
-              <a:rPr lang="en-US" dirty="0"/>
-              <a:t>The error calculations are the same, only Y is involved. </a:t>
-            </a:r>
-          </a:p>
-          <a:p>
-            <a:pPr lvl="1"/>
-            <a:r>
-              <a:rPr lang="en-US" dirty="0"/>
-              <a:t>Error looks at Y versus predicted Y, so math is identical no matter size. </a:t>
-            </a:r>
-          </a:p>
-          <a:p>
-            <a:r>
-              <a:rPr lang="en-US" dirty="0"/>
-              <a:t>The X values are generally called features or the feature set. </a:t>
-            </a:r>
-          </a:p>
-        </p:txBody>
-      </p:sp>
-      <p:pic>
-        <p:nvPicPr>
-          <p:cNvPr id="1026" name="Picture 2" descr="Multiple linear regression made simple - Stats and R">
-            <a:extLst>
-              <a:ext uri="{FF2B5EF4-FFF2-40B4-BE49-F238E27FC236}">
-                <a16:creationId xmlns:a16="http://schemas.microsoft.com/office/drawing/2014/main" id="{C8758913-8246-E92D-539B-CD9833E3A8AA}"/>
-              </a:ext>
-            </a:extLst>
-          </p:cNvPr>
-          <p:cNvPicPr>
-            <a:picLocks noChangeAspect="1" noChangeArrowheads="1"/>
-          </p:cNvPicPr>
-          <p:nvPr/>
-        </p:nvPicPr>
-        <p:blipFill>
-          <a:blip r:embed="rId2">
-            <a:extLst>
-              <a:ext uri="{28A0092B-C50C-407E-A947-70E740481C1C}">
-                <a14:useLocalDpi xmlns:a14="http://schemas.microsoft.com/office/drawing/2010/main" val="0"/>
-              </a:ext>
-            </a:extLst>
-          </a:blip>
-          <a:srcRect/>
-          <a:stretch>
-            <a:fillRect/>
-          </a:stretch>
-        </p:blipFill>
-        <p:spPr bwMode="auto">
-          <a:xfrm>
-            <a:off x="7747000" y="1608481"/>
-            <a:ext cx="4445000" cy="4445000"/>
-          </a:xfrm>
-          <a:prstGeom prst="rect">
-            <a:avLst/>
-          </a:prstGeom>
-          <a:noFill/>
-          <a:extLst>
-            <a:ext uri="{909E8E84-426E-40DD-AFC4-6F175D3DCCD1}">
-              <a14:hiddenFill xmlns:a14="http://schemas.microsoft.com/office/drawing/2010/main">
-                <a:solidFill>
-                  <a:srgbClr val="FFFFFF"/>
-                </a:solidFill>
-              </a14:hiddenFill>
-            </a:ext>
-          </a:extLst>
-        </p:spPr>
-      </p:pic>
-    </p:spTree>
-    <p:extLst>
-      <p:ext uri="{BB962C8B-B14F-4D97-AF65-F5344CB8AC3E}">
-        <p14:creationId xmlns:p14="http://schemas.microsoft.com/office/powerpoint/2010/main" val="2214667635"/>
       </p:ext>
     </p:extLst>
   </p:cSld>
